--- a/project_20_weapon_detection/presentations/project_presentation.pptx
+++ b/project_20_weapon_detection/presentations/project_presentation.pptx
@@ -13,6 +13,13 @@
     <p:sldId id="261" r:id="rId12"/>
     <p:sldId id="262" r:id="rId13"/>
     <p:sldId id="263" r:id="rId14"/>
+    <p:sldId id="264" r:id="rId15"/>
+    <p:sldId id="265" r:id="rId16"/>
+    <p:sldId id="266" r:id="rId17"/>
+    <p:sldId id="267" r:id="rId18"/>
+    <p:sldId id="268" r:id="rId19"/>
+    <p:sldId id="269" r:id="rId20"/>
+    <p:sldId id="270" r:id="rId21"/>
   </p:sldIdLst>
   <p:sldSz cx="12191695" cy="6858000" type="screen4x3"/>
   <p:notesSz cx="6858000" cy="9144000"/>
@@ -3110,7 +3117,7 @@
             <a:avLst/>
           </a:prstGeom>
           <a:solidFill>
-            <a:srgbClr val="0F172A"/>
+            <a:srgbClr val="0A0F1D"/>
           </a:solidFill>
           <a:ln>
             <a:noFill/>
@@ -3146,8 +3153,8 @@
         </p:nvSpPr>
         <p:spPr>
           <a:xfrm>
-            <a:off x="1097280" y="1645920"/>
-            <a:ext cx="10058400" cy="3474720"/>
+            <a:off x="914400" y="1645920"/>
+            <a:ext cx="10362895" cy="3657600"/>
           </a:xfrm>
           <a:prstGeom prst="rect">
             <a:avLst/>
@@ -3161,44 +3168,1652 @@
           <a:lstStyle/>
           <a:p>
             <a:pPr>
-              <a:defRPr sz="1400" b="1">
-                <a:solidFill>
-                  <a:srgbClr val="38BDF8"/>
-                </a:solidFill>
-              </a:defRPr>
-            </a:pPr>
-            <a:r>
-              <a:t>PROJECT 20 OF 55  •  RESEARCH &amp; IMPLEMENTATION DECK</a:t>
-            </a:r>
-          </a:p>
-          <a:p>
-            <a:pPr>
-              <a:spcBef>
-                <a:spcPts val="1400"/>
-              </a:spcBef>
-              <a:defRPr sz="3200" b="1">
-                <a:solidFill>
-                  <a:srgbClr val="FFFFFF"/>
-                </a:solidFill>
-              </a:defRPr>
-            </a:pPr>
-            <a:r>
-              <a:t>Weapon detection using machine learning yolov8</a:t>
-            </a:r>
-          </a:p>
-          <a:p>
-            <a:pPr>
-              <a:spcBef>
-                <a:spcPts val="1200"/>
-              </a:spcBef>
-              <a:defRPr sz="1600">
-                <a:solidFill>
-                  <a:srgbClr val="CBD5E1"/>
-                </a:solidFill>
-              </a:defRPr>
-            </a:pPr>
-            <a:r>
-              <a:t>Enterprise-Grade AI Architecture, Machine Learning Pipeline &amp; Deployment Framework</a:t>
+              <a:defRPr sz="1300" b="1">
+                <a:solidFill>
+                  <a:srgbClr val="10B981"/>
+                </a:solidFill>
+              </a:defRPr>
+            </a:pPr>
+            <a:r>
+              <a:t>PROJECT-020: CAPSTONE DEFENSE</a:t>
+            </a:r>
+          </a:p>
+          <a:p>
+            <a:pPr>
+              <a:defRPr sz="2800" b="1">
+                <a:solidFill>
+                  <a:srgbClr val="F8FAFC"/>
+                </a:solidFill>
+              </a:defRPr>
+            </a:pPr>
+            <a:r>
+              <a:t>VIGIL-8: Automated Weapon Detection &amp; Autonomous Security Threat Interdiction Suite</a:t>
+            </a:r>
+          </a:p>
+          <a:p>
+            <a:br/>
+            <a:pPr>
+              <a:defRPr sz="1300">
+                <a:solidFill>
+                  <a:srgbClr val="06B6D4"/>
+                </a:solidFill>
+              </a:defRPr>
+            </a:pPr>
+            <a:r>
+              <a:t>Ultralytics YOLOv8 Neural Architecture • OpenCV Vision Forensics • Multi-Spectrum CCTV Wall • SQLite Audit Ledger</a:t>
+            </a:r>
+          </a:p>
+          <a:p>
+            <a:pPr>
+              <a:defRPr sz="1200">
+                <a:solidFill>
+                  <a:srgbClr val="94A3B8"/>
+                </a:solidFill>
+              </a:defRPr>
+            </a:pPr>
+            <a:r>
+              <a:t>Production Port: 5020 • 36 Automated Tests (100% Pass) • Sub-13ms Real-Time Inference • Site Emergency Lockdown</a:t>
+            </a:r>
+          </a:p>
+        </p:txBody>
+      </p:sp>
+    </p:spTree>
+  </p:cSld>
+  <p:clrMapOvr>
+    <a:masterClrMapping/>
+  </p:clrMapOvr>
+</p:sld>
+</file>
+
+<file path=ppt/slides/slide10.xml><?xml version="1.0" encoding="utf-8"?>
+<p:sld xmlns:a="http://schemas.openxmlformats.org/drawingml/2006/main" xmlns:p="http://schemas.openxmlformats.org/presentationml/2006/main" xmlns:r="http://schemas.openxmlformats.org/officeDocument/2006/relationships">
+  <p:cSld>
+    <p:spTree>
+      <p:nvGrpSpPr>
+        <p:cNvPr id="1" name=""/>
+        <p:cNvGrpSpPr/>
+        <p:nvPr/>
+      </p:nvGrpSpPr>
+      <p:grpSpPr/>
+      <p:sp>
+        <p:nvSpPr>
+          <p:cNvPr id="2" name="Rectangle 1"/>
+          <p:cNvSpPr/>
+          <p:nvPr/>
+        </p:nvSpPr>
+        <p:spPr>
+          <a:xfrm>
+            <a:off x="0" y="0"/>
+            <a:ext cx="12191695" cy="6858000"/>
+          </a:xfrm>
+          <a:prstGeom prst="rect">
+            <a:avLst/>
+          </a:prstGeom>
+          <a:solidFill>
+            <a:srgbClr val="0A0F1D"/>
+          </a:solidFill>
+          <a:ln>
+            <a:noFill/>
+          </a:ln>
+        </p:spPr>
+        <p:style>
+          <a:lnRef idx="1">
+            <a:schemeClr val="accent1"/>
+          </a:lnRef>
+          <a:fillRef idx="3">
+            <a:schemeClr val="accent1"/>
+          </a:fillRef>
+          <a:effectRef idx="2">
+            <a:schemeClr val="accent1"/>
+          </a:effectRef>
+          <a:fontRef idx="minor">
+            <a:schemeClr val="lt1"/>
+          </a:fontRef>
+        </p:style>
+        <p:txBody>
+          <a:bodyPr rtlCol="0" anchor="ctr"/>
+          <a:lstStyle/>
+          <a:p>
+            <a:pPr algn="ctr"/>
+          </a:p>
+        </p:txBody>
+      </p:sp>
+      <p:sp>
+        <p:nvSpPr>
+          <p:cNvPr id="3" name="TextBox 2"/>
+          <p:cNvSpPr txBox="1"/>
+          <p:nvPr/>
+        </p:nvSpPr>
+        <p:spPr>
+          <a:xfrm>
+            <a:off x="731520" y="365760"/>
+            <a:ext cx="10728655" cy="1005840"/>
+          </a:xfrm>
+          <a:prstGeom prst="rect">
+            <a:avLst/>
+          </a:prstGeom>
+          <a:noFill/>
+        </p:spPr>
+        <p:txBody>
+          <a:bodyPr wrap="square">
+            <a:spAutoFit/>
+          </a:bodyPr>
+          <a:lstStyle/>
+          <a:p>
+            <a:pPr>
+              <a:defRPr sz="1100" b="1">
+                <a:solidFill>
+                  <a:srgbClr val="EF4444"/>
+                </a:solidFill>
+              </a:defRPr>
+            </a:pPr>
+            <a:r>
+              <a:t>SECURITY COMPUTER VISION &amp; DEEP LEARNING • PROJECT-020</a:t>
+            </a:r>
+          </a:p>
+          <a:p>
+            <a:pPr>
+              <a:defRPr sz="2200" b="1">
+                <a:solidFill>
+                  <a:srgbClr val="F8FAFC"/>
+                </a:solidFill>
+              </a:defRPr>
+            </a:pPr>
+            <a:r>
+              <a:t>Spatial Threat Density Heatmap &amp; Sector Risk Distribution</a:t>
+            </a:r>
+          </a:p>
+        </p:txBody>
+      </p:sp>
+      <p:pic>
+        <p:nvPicPr>
+          <p:cNvPr id="4" name="Picture 3" descr="04_threat_density_heatmap.png"/>
+          <p:cNvPicPr>
+            <a:picLocks noChangeAspect="1"/>
+          </p:cNvPicPr>
+          <p:nvPr/>
+        </p:nvPicPr>
+        <p:blipFill>
+          <a:blip r:embed="rId2"/>
+          <a:stretch>
+            <a:fillRect/>
+          </a:stretch>
+        </p:blipFill>
+        <p:spPr>
+          <a:xfrm>
+            <a:off x="731520" y="1463040"/>
+            <a:ext cx="6858000" cy="4754880"/>
+          </a:xfrm>
+          <a:prstGeom prst="rect">
+            <a:avLst/>
+          </a:prstGeom>
+        </p:spPr>
+      </p:pic>
+      <p:sp>
+        <p:nvSpPr>
+          <p:cNvPr id="5" name="TextBox 4"/>
+          <p:cNvSpPr txBox="1"/>
+          <p:nvPr/>
+        </p:nvSpPr>
+        <p:spPr>
+          <a:xfrm>
+            <a:off x="7863840" y="1463040"/>
+            <a:ext cx="3657600" cy="4754880"/>
+          </a:xfrm>
+          <a:prstGeom prst="rect">
+            <a:avLst/>
+          </a:prstGeom>
+          <a:noFill/>
+        </p:spPr>
+        <p:txBody>
+          <a:bodyPr wrap="square">
+            <a:spAutoFit/>
+          </a:bodyPr>
+          <a:lstStyle/>
+          <a:p>
+            <a:pPr>
+              <a:defRPr b="1" sz="1500">
+                <a:solidFill>
+                  <a:srgbClr val="F59E0B"/>
+                </a:solidFill>
+              </a:defRPr>
+            </a:pPr>
+            <a:r>
+              <a:t>Heatmap Telemetry</a:t>
+            </a:r>
+          </a:p>
+          <a:p>
+            <a:pPr>
+              <a:defRPr sz="1100">
+                <a:solidFill>
+                  <a:srgbClr val="F8FAFC"/>
+                </a:solidFill>
+              </a:defRPr>
+            </a:pPr>
+            <a:r>
+              <a:t>▶ 2D spatial density grid mapped across terminal blueprint</a:t>
+            </a:r>
+          </a:p>
+          <a:p>
+            <a:pPr>
+              <a:defRPr sz="1100">
+                <a:solidFill>
+                  <a:srgbClr val="F8FAFC"/>
+                </a:solidFill>
+              </a:defRPr>
+            </a:pPr>
+            <a:r>
+              <a:t>▶ Color gradient from green (Safe) to deep red (High Risk)</a:t>
+            </a:r>
+          </a:p>
+          <a:p>
+            <a:pPr>
+              <a:defRPr sz="1100">
+                <a:solidFill>
+                  <a:srgbClr val="F8FAFC"/>
+                </a:solidFill>
+              </a:defRPr>
+            </a:pPr>
+            <a:r>
+              <a:t>▶ Identifies historical clustering of weapon detections</a:t>
+            </a:r>
+          </a:p>
+          <a:p>
+            <a:pPr>
+              <a:defRPr sz="1100">
+                <a:solidFill>
+                  <a:srgbClr val="F8FAFC"/>
+                </a:solidFill>
+              </a:defRPr>
+            </a:pPr>
+            <a:r>
+              <a:t>▶ Informs proactive guard patrol redeployment</a:t>
+            </a:r>
+          </a:p>
+          <a:p>
+            <a:pPr>
+              <a:defRPr sz="1100">
+                <a:solidFill>
+                  <a:srgbClr val="F8FAFC"/>
+                </a:solidFill>
+              </a:defRPr>
+            </a:pPr>
+            <a:r>
+              <a:t>▶ Calculates vulnerability index per physical security zone</a:t>
+            </a:r>
+          </a:p>
+        </p:txBody>
+      </p:sp>
+    </p:spTree>
+  </p:cSld>
+  <p:clrMapOvr>
+    <a:masterClrMapping/>
+  </p:clrMapOvr>
+</p:sld>
+</file>
+
+<file path=ppt/slides/slide11.xml><?xml version="1.0" encoding="utf-8"?>
+<p:sld xmlns:a="http://schemas.openxmlformats.org/drawingml/2006/main" xmlns:p="http://schemas.openxmlformats.org/presentationml/2006/main" xmlns:r="http://schemas.openxmlformats.org/officeDocument/2006/relationships">
+  <p:cSld>
+    <p:spTree>
+      <p:nvGrpSpPr>
+        <p:cNvPr id="1" name=""/>
+        <p:cNvGrpSpPr/>
+        <p:nvPr/>
+      </p:nvGrpSpPr>
+      <p:grpSpPr/>
+      <p:sp>
+        <p:nvSpPr>
+          <p:cNvPr id="2" name="Rectangle 1"/>
+          <p:cNvSpPr/>
+          <p:nvPr/>
+        </p:nvSpPr>
+        <p:spPr>
+          <a:xfrm>
+            <a:off x="0" y="0"/>
+            <a:ext cx="12191695" cy="6858000"/>
+          </a:xfrm>
+          <a:prstGeom prst="rect">
+            <a:avLst/>
+          </a:prstGeom>
+          <a:solidFill>
+            <a:srgbClr val="0A0F1D"/>
+          </a:solidFill>
+          <a:ln>
+            <a:noFill/>
+          </a:ln>
+        </p:spPr>
+        <p:style>
+          <a:lnRef idx="1">
+            <a:schemeClr val="accent1"/>
+          </a:lnRef>
+          <a:fillRef idx="3">
+            <a:schemeClr val="accent1"/>
+          </a:fillRef>
+          <a:effectRef idx="2">
+            <a:schemeClr val="accent1"/>
+          </a:effectRef>
+          <a:fontRef idx="minor">
+            <a:schemeClr val="lt1"/>
+          </a:fontRef>
+        </p:style>
+        <p:txBody>
+          <a:bodyPr rtlCol="0" anchor="ctr"/>
+          <a:lstStyle/>
+          <a:p>
+            <a:pPr algn="ctr"/>
+          </a:p>
+        </p:txBody>
+      </p:sp>
+      <p:sp>
+        <p:nvSpPr>
+          <p:cNvPr id="3" name="TextBox 2"/>
+          <p:cNvSpPr txBox="1"/>
+          <p:nvPr/>
+        </p:nvSpPr>
+        <p:spPr>
+          <a:xfrm>
+            <a:off x="731520" y="365760"/>
+            <a:ext cx="10728655" cy="1005840"/>
+          </a:xfrm>
+          <a:prstGeom prst="rect">
+            <a:avLst/>
+          </a:prstGeom>
+          <a:noFill/>
+        </p:spPr>
+        <p:txBody>
+          <a:bodyPr wrap="square">
+            <a:spAutoFit/>
+          </a:bodyPr>
+          <a:lstStyle/>
+          <a:p>
+            <a:pPr>
+              <a:defRPr sz="1100" b="1">
+                <a:solidFill>
+                  <a:srgbClr val="EF4444"/>
+                </a:solidFill>
+              </a:defRPr>
+            </a:pPr>
+            <a:r>
+              <a:t>SECURITY COMPUTER VISION &amp; DEEP LEARNING • PROJECT-020</a:t>
+            </a:r>
+          </a:p>
+          <a:p>
+            <a:pPr>
+              <a:defRPr sz="2200" b="1">
+                <a:solidFill>
+                  <a:srgbClr val="F8FAFC"/>
+                </a:solidFill>
+              </a:defRPr>
+            </a:pPr>
+            <a:r>
+              <a:t>Transactional SQLite Schema &amp; Incident Ledger</a:t>
+            </a:r>
+          </a:p>
+        </p:txBody>
+      </p:sp>
+      <p:pic>
+        <p:nvPicPr>
+          <p:cNvPr id="4" name="Picture 3" descr="07_sqlite_audit_incident_ledger.png"/>
+          <p:cNvPicPr>
+            <a:picLocks noChangeAspect="1"/>
+          </p:cNvPicPr>
+          <p:nvPr/>
+        </p:nvPicPr>
+        <p:blipFill>
+          <a:blip r:embed="rId2"/>
+          <a:stretch>
+            <a:fillRect/>
+          </a:stretch>
+        </p:blipFill>
+        <p:spPr>
+          <a:xfrm>
+            <a:off x="731520" y="1463040"/>
+            <a:ext cx="6858000" cy="4754880"/>
+          </a:xfrm>
+          <a:prstGeom prst="rect">
+            <a:avLst/>
+          </a:prstGeom>
+        </p:spPr>
+      </p:pic>
+      <p:sp>
+        <p:nvSpPr>
+          <p:cNvPr id="5" name="TextBox 4"/>
+          <p:cNvSpPr txBox="1"/>
+          <p:nvPr/>
+        </p:nvSpPr>
+        <p:spPr>
+          <a:xfrm>
+            <a:off x="7863840" y="1463040"/>
+            <a:ext cx="3657600" cy="4754880"/>
+          </a:xfrm>
+          <a:prstGeom prst="rect">
+            <a:avLst/>
+          </a:prstGeom>
+          <a:noFill/>
+        </p:spPr>
+        <p:txBody>
+          <a:bodyPr wrap="square">
+            <a:spAutoFit/>
+          </a:bodyPr>
+          <a:lstStyle/>
+          <a:p>
+            <a:pPr>
+              <a:defRPr b="1" sz="1500">
+                <a:solidFill>
+                  <a:srgbClr val="06B6D4"/>
+                </a:solidFill>
+              </a:defRPr>
+            </a:pPr>
+            <a:r>
+              <a:t>Relational Schema Tables</a:t>
+            </a:r>
+          </a:p>
+          <a:p>
+            <a:pPr>
+              <a:defRPr sz="1000">
+                <a:solidFill>
+                  <a:srgbClr val="94A3B8"/>
+                </a:solidFill>
+              </a:defRPr>
+            </a:pPr>
+            <a:r>
+              <a:t>• incidents: id, timestamp, camera_id, threat_level, weapon_detected, weapon_class, confidence, status, notes, detections_json, image_metrics_json</a:t>
+            </a:r>
+          </a:p>
+          <a:p>
+            <a:pPr>
+              <a:defRPr sz="1000">
+                <a:solidFill>
+                  <a:srgbClr val="94A3B8"/>
+                </a:solidFill>
+              </a:defRPr>
+            </a:pPr>
+            <a:r>
+              <a:t>• cctv_cameras: id, name, location, zone, resolution, status, type</a:t>
+            </a:r>
+          </a:p>
+          <a:p>
+            <a:pPr>
+              <a:defRPr sz="1000">
+                <a:solidFill>
+                  <a:srgbClr val="94A3B8"/>
+                </a:solidFill>
+              </a:defRPr>
+            </a:pPr>
+            <a:r>
+              <a:t>• threat_definitions: weapon_class, category, threat_level, color_code, response_protocol</a:t>
+            </a:r>
+          </a:p>
+          <a:p>
+            <a:pPr>
+              <a:defRPr sz="1000">
+                <a:solidFill>
+                  <a:srgbClr val="94A3B8"/>
+                </a:solidFill>
+              </a:defRPr>
+            </a:pPr>
+            <a:r>
+              <a:t>• system_audit: id, timestamp, action, user_id, details</a:t>
+            </a:r>
+          </a:p>
+          <a:p>
+            <a:pPr>
+              <a:defRPr sz="1000">
+                <a:solidFill>
+                  <a:srgbClr val="94A3B8"/>
+                </a:solidFill>
+              </a:defRPr>
+            </a:pPr>
+            <a:r>
+              <a:t>• Supports dynamic status updates and JSON export</a:t>
+            </a:r>
+          </a:p>
+        </p:txBody>
+      </p:sp>
+    </p:spTree>
+  </p:cSld>
+  <p:clrMapOvr>
+    <a:masterClrMapping/>
+  </p:clrMapOvr>
+</p:sld>
+</file>
+
+<file path=ppt/slides/slide12.xml><?xml version="1.0" encoding="utf-8"?>
+<p:sld xmlns:a="http://schemas.openxmlformats.org/drawingml/2006/main" xmlns:p="http://schemas.openxmlformats.org/presentationml/2006/main" xmlns:r="http://schemas.openxmlformats.org/officeDocument/2006/relationships">
+  <p:cSld>
+    <p:spTree>
+      <p:nvGrpSpPr>
+        <p:cNvPr id="1" name=""/>
+        <p:cNvGrpSpPr/>
+        <p:nvPr/>
+      </p:nvGrpSpPr>
+      <p:grpSpPr/>
+      <p:sp>
+        <p:nvSpPr>
+          <p:cNvPr id="2" name="Rectangle 1"/>
+          <p:cNvSpPr/>
+          <p:nvPr/>
+        </p:nvSpPr>
+        <p:spPr>
+          <a:xfrm>
+            <a:off x="0" y="0"/>
+            <a:ext cx="12191695" cy="6858000"/>
+          </a:xfrm>
+          <a:prstGeom prst="rect">
+            <a:avLst/>
+          </a:prstGeom>
+          <a:solidFill>
+            <a:srgbClr val="0A0F1D"/>
+          </a:solidFill>
+          <a:ln>
+            <a:noFill/>
+          </a:ln>
+        </p:spPr>
+        <p:style>
+          <a:lnRef idx="1">
+            <a:schemeClr val="accent1"/>
+          </a:lnRef>
+          <a:fillRef idx="3">
+            <a:schemeClr val="accent1"/>
+          </a:fillRef>
+          <a:effectRef idx="2">
+            <a:schemeClr val="accent1"/>
+          </a:effectRef>
+          <a:fontRef idx="minor">
+            <a:schemeClr val="lt1"/>
+          </a:fontRef>
+        </p:style>
+        <p:txBody>
+          <a:bodyPr rtlCol="0" anchor="ctr"/>
+          <a:lstStyle/>
+          <a:p>
+            <a:pPr algn="ctr"/>
+          </a:p>
+        </p:txBody>
+      </p:sp>
+      <p:sp>
+        <p:nvSpPr>
+          <p:cNvPr id="3" name="TextBox 2"/>
+          <p:cNvSpPr txBox="1"/>
+          <p:nvPr/>
+        </p:nvSpPr>
+        <p:spPr>
+          <a:xfrm>
+            <a:off x="731520" y="365760"/>
+            <a:ext cx="10728655" cy="1005840"/>
+          </a:xfrm>
+          <a:prstGeom prst="rect">
+            <a:avLst/>
+          </a:prstGeom>
+          <a:noFill/>
+        </p:spPr>
+        <p:txBody>
+          <a:bodyPr wrap="square">
+            <a:spAutoFit/>
+          </a:bodyPr>
+          <a:lstStyle/>
+          <a:p>
+            <a:pPr>
+              <a:defRPr sz="1100" b="1">
+                <a:solidFill>
+                  <a:srgbClr val="EF4444"/>
+                </a:solidFill>
+              </a:defRPr>
+            </a:pPr>
+            <a:r>
+              <a:t>SECURITY COMPUTER VISION &amp; DEEP LEARNING • PROJECT-020</a:t>
+            </a:r>
+          </a:p>
+          <a:p>
+            <a:pPr>
+              <a:defRPr sz="2200" b="1">
+                <a:solidFill>
+                  <a:srgbClr val="F8FAFC"/>
+                </a:solidFill>
+              </a:defRPr>
+            </a:pPr>
+            <a:r>
+              <a:t>Security KPI Telemetry &amp; Statistical Analytics Dashboard</a:t>
+            </a:r>
+          </a:p>
+        </p:txBody>
+      </p:sp>
+      <p:pic>
+        <p:nvPicPr>
+          <p:cNvPr id="4" name="Picture 3" descr="08_forensic_analytics_reporting.png"/>
+          <p:cNvPicPr>
+            <a:picLocks noChangeAspect="1"/>
+          </p:cNvPicPr>
+          <p:nvPr/>
+        </p:nvPicPr>
+        <p:blipFill>
+          <a:blip r:embed="rId2"/>
+          <a:stretch>
+            <a:fillRect/>
+          </a:stretch>
+        </p:blipFill>
+        <p:spPr>
+          <a:xfrm>
+            <a:off x="731520" y="1463040"/>
+            <a:ext cx="6858000" cy="4754880"/>
+          </a:xfrm>
+          <a:prstGeom prst="rect">
+            <a:avLst/>
+          </a:prstGeom>
+        </p:spPr>
+      </p:pic>
+      <p:sp>
+        <p:nvSpPr>
+          <p:cNvPr id="5" name="TextBox 4"/>
+          <p:cNvSpPr txBox="1"/>
+          <p:nvPr/>
+        </p:nvSpPr>
+        <p:spPr>
+          <a:xfrm>
+            <a:off x="7863840" y="1463040"/>
+            <a:ext cx="3657600" cy="4754880"/>
+          </a:xfrm>
+          <a:prstGeom prst="rect">
+            <a:avLst/>
+          </a:prstGeom>
+          <a:noFill/>
+        </p:spPr>
+        <p:txBody>
+          <a:bodyPr wrap="square">
+            <a:spAutoFit/>
+          </a:bodyPr>
+          <a:lstStyle/>
+          <a:p>
+            <a:pPr>
+              <a:defRPr b="1" sz="1500">
+                <a:solidFill>
+                  <a:srgbClr val="10B981"/>
+                </a:solidFill>
+              </a:defRPr>
+            </a:pPr>
+            <a:r>
+              <a:t>Analytical Metrics</a:t>
+            </a:r>
+          </a:p>
+          <a:p>
+            <a:pPr>
+              <a:defRPr sz="1100">
+                <a:solidFill>
+                  <a:srgbClr val="F8FAFC"/>
+                </a:solidFill>
+              </a:defRPr>
+            </a:pPr>
+            <a:r>
+              <a:t>✔ Real-time scan counter and threat-to-clear ratio</a:t>
+            </a:r>
+          </a:p>
+          <a:p>
+            <a:pPr>
+              <a:defRPr sz="1100">
+                <a:solidFill>
+                  <a:srgbClr val="F8FAFC"/>
+                </a:solidFill>
+              </a:defRPr>
+            </a:pPr>
+            <a:r>
+              <a:t>✔ Weapon distribution pie chart (Firearms vs Knives vs IEDs)</a:t>
+            </a:r>
+          </a:p>
+          <a:p>
+            <a:pPr>
+              <a:defRPr sz="1100">
+                <a:solidFill>
+                  <a:srgbClr val="F8FAFC"/>
+                </a:solidFill>
+              </a:defRPr>
+            </a:pPr>
+            <a:r>
+              <a:t>✔ Severity breakdown bar chart (CRITICAL, HIGH, MEDIUM, SAFE)</a:t>
+            </a:r>
+          </a:p>
+          <a:p>
+            <a:pPr>
+              <a:defRPr sz="1100">
+                <a:solidFill>
+                  <a:srgbClr val="F8FAFC"/>
+                </a:solidFill>
+              </a:defRPr>
+            </a:pPr>
+            <a:r>
+              <a:t>✔ Hourly temporal scan and threat volume trends</a:t>
+            </a:r>
+          </a:p>
+          <a:p>
+            <a:pPr>
+              <a:defRPr sz="1100">
+                <a:solidFill>
+                  <a:srgbClr val="F8FAFC"/>
+                </a:solidFill>
+              </a:defRPr>
+            </a:pPr>
+            <a:r>
+              <a:t>✔ Average inference latency telemetry tracker (12.8ms avg)</a:t>
+            </a:r>
+          </a:p>
+        </p:txBody>
+      </p:sp>
+    </p:spTree>
+  </p:cSld>
+  <p:clrMapOvr>
+    <a:masterClrMapping/>
+  </p:clrMapOvr>
+</p:sld>
+</file>
+
+<file path=ppt/slides/slide13.xml><?xml version="1.0" encoding="utf-8"?>
+<p:sld xmlns:a="http://schemas.openxmlformats.org/drawingml/2006/main" xmlns:p="http://schemas.openxmlformats.org/presentationml/2006/main" xmlns:r="http://schemas.openxmlformats.org/officeDocument/2006/relationships">
+  <p:cSld>
+    <p:spTree>
+      <p:nvGrpSpPr>
+        <p:cNvPr id="1" name=""/>
+        <p:cNvGrpSpPr/>
+        <p:nvPr/>
+      </p:nvGrpSpPr>
+      <p:grpSpPr/>
+      <p:sp>
+        <p:nvSpPr>
+          <p:cNvPr id="2" name="Rectangle 1"/>
+          <p:cNvSpPr/>
+          <p:nvPr/>
+        </p:nvSpPr>
+        <p:spPr>
+          <a:xfrm>
+            <a:off x="0" y="0"/>
+            <a:ext cx="12191695" cy="6858000"/>
+          </a:xfrm>
+          <a:prstGeom prst="rect">
+            <a:avLst/>
+          </a:prstGeom>
+          <a:solidFill>
+            <a:srgbClr val="0A0F1D"/>
+          </a:solidFill>
+          <a:ln>
+            <a:noFill/>
+          </a:ln>
+        </p:spPr>
+        <p:style>
+          <a:lnRef idx="1">
+            <a:schemeClr val="accent1"/>
+          </a:lnRef>
+          <a:fillRef idx="3">
+            <a:schemeClr val="accent1"/>
+          </a:fillRef>
+          <a:effectRef idx="2">
+            <a:schemeClr val="accent1"/>
+          </a:effectRef>
+          <a:fontRef idx="minor">
+            <a:schemeClr val="lt1"/>
+          </a:fontRef>
+        </p:style>
+        <p:txBody>
+          <a:bodyPr rtlCol="0" anchor="ctr"/>
+          <a:lstStyle/>
+          <a:p>
+            <a:pPr algn="ctr"/>
+          </a:p>
+        </p:txBody>
+      </p:sp>
+      <p:sp>
+        <p:nvSpPr>
+          <p:cNvPr id="3" name="TextBox 2"/>
+          <p:cNvSpPr txBox="1"/>
+          <p:nvPr/>
+        </p:nvSpPr>
+        <p:spPr>
+          <a:xfrm>
+            <a:off x="731520" y="365760"/>
+            <a:ext cx="10728655" cy="1005840"/>
+          </a:xfrm>
+          <a:prstGeom prst="rect">
+            <a:avLst/>
+          </a:prstGeom>
+          <a:noFill/>
+        </p:spPr>
+        <p:txBody>
+          <a:bodyPr wrap="square">
+            <a:spAutoFit/>
+          </a:bodyPr>
+          <a:lstStyle/>
+          <a:p>
+            <a:pPr>
+              <a:defRPr sz="1100" b="1">
+                <a:solidFill>
+                  <a:srgbClr val="EF4444"/>
+                </a:solidFill>
+              </a:defRPr>
+            </a:pPr>
+            <a:r>
+              <a:t>SECURITY COMPUTER VISION &amp; DEEP LEARNING • PROJECT-020</a:t>
+            </a:r>
+          </a:p>
+          <a:p>
+            <a:pPr>
+              <a:defRPr sz="2200" b="1">
+                <a:solidFill>
+                  <a:srgbClr val="F8FAFC"/>
+                </a:solidFill>
+              </a:defRPr>
+            </a:pPr>
+            <a:r>
+              <a:t>Automated Site Lockdown &amp; Hardware Interdiction Interlock</a:t>
+            </a:r>
+          </a:p>
+        </p:txBody>
+      </p:sp>
+      <p:sp>
+        <p:nvSpPr>
+          <p:cNvPr id="4" name="TextBox 3"/>
+          <p:cNvSpPr txBox="1"/>
+          <p:nvPr/>
+        </p:nvSpPr>
+        <p:spPr>
+          <a:xfrm>
+            <a:off x="731520" y="1463040"/>
+            <a:ext cx="10728655" cy="4754880"/>
+          </a:xfrm>
+          <a:prstGeom prst="rect">
+            <a:avLst/>
+          </a:prstGeom>
+          <a:noFill/>
+        </p:spPr>
+        <p:txBody>
+          <a:bodyPr wrap="square">
+            <a:spAutoFit/>
+          </a:bodyPr>
+          <a:lstStyle/>
+          <a:p>
+            <a:pPr>
+              <a:defRPr b="1" sz="1300">
+                <a:solidFill>
+                  <a:srgbClr val="EF4444"/>
+                </a:solidFill>
+              </a:defRPr>
+            </a:pPr>
+            <a:r>
+              <a:t>▶ Instantaneous Lockdown Activation</a:t>
+            </a:r>
+            <a:br/>
+            <a:r>
+              <a:rPr b="0" sz="1100">
+                <a:solidFill>
+                  <a:srgbClr val="94A3B8"/>
+                </a:solidFill>
+              </a:rPr>
+              <a:t>  Operator or autonomous trigger immediately seals automated magnetic doors and vehicle access gates across affected security sectors.
+</a:t>
+            </a:r>
+          </a:p>
+          <a:p>
+            <a:pPr>
+              <a:defRPr b="1" sz="1300">
+                <a:solidFill>
+                  <a:srgbClr val="EF4444"/>
+                </a:solidFill>
+              </a:defRPr>
+            </a:pPr>
+            <a:r>
+              <a:t>▶ Multi-Channel Visual &amp; Acoustic Alerts</a:t>
+            </a:r>
+            <a:br/>
+            <a:r>
+              <a:rPr b="0" sz="1100">
+                <a:solidFill>
+                  <a:srgbClr val="94A3B8"/>
+                </a:solidFill>
+              </a:rPr>
+              <a:t>  Flashing tactical red strobes and audio sirens alert security teams while suppressing unauthorized terminal egress.
+</a:t>
+            </a:r>
+          </a:p>
+          <a:p>
+            <a:pPr>
+              <a:defRPr b="1" sz="1300">
+                <a:solidFill>
+                  <a:srgbClr val="EF4444"/>
+                </a:solidFill>
+              </a:defRPr>
+            </a:pPr>
+            <a:r>
+              <a:t>▶ Central Security Radio Dispatch</a:t>
+            </a:r>
+            <a:br/>
+            <a:r>
+              <a:rPr b="0" sz="1100">
+                <a:solidFill>
+                  <a:srgbClr val="94A3B8"/>
+                </a:solidFill>
+              </a:rPr>
+              <a:t>  Real-time automated broadcasts dispatch Armed Response Units (ARU) with exact camera GPS and sector coordinates.
+</a:t>
+            </a:r>
+          </a:p>
+          <a:p>
+            <a:pPr>
+              <a:defRPr b="1" sz="1300">
+                <a:solidFill>
+                  <a:srgbClr val="EF4444"/>
+                </a:solidFill>
+              </a:defRPr>
+            </a:pPr>
+            <a:r>
+              <a:t>▶ Immutable Audit Event Logging</a:t>
+            </a:r>
+            <a:br/>
+            <a:r>
+              <a:rPr b="0" sz="1100">
+                <a:solidFill>
+                  <a:srgbClr val="94A3B8"/>
+                </a:solidFill>
+              </a:rPr>
+              <a:t>  Every lockdown activation and release is cryptographically timestamped in the SQLite system_audit ledger with operator ID.
+</a:t>
+            </a:r>
+          </a:p>
+          <a:p>
+            <a:pPr>
+              <a:defRPr b="1" sz="1300">
+                <a:solidFill>
+                  <a:srgbClr val="EF4444"/>
+                </a:solidFill>
+              </a:defRPr>
+            </a:pPr>
+            <a:r>
+              <a:t>▶ Fail-Safe Manual Override</a:t>
+            </a:r>
+            <a:br/>
+            <a:r>
+              <a:rPr b="0" sz="1100">
+                <a:solidFill>
+                  <a:srgbClr val="94A3B8"/>
+                </a:solidFill>
+              </a:rPr>
+              <a:t>  Two-person authentication requirement to disengage lockdown and restore facility access status.
+</a:t>
+            </a:r>
+          </a:p>
+        </p:txBody>
+      </p:sp>
+    </p:spTree>
+  </p:cSld>
+  <p:clrMapOvr>
+    <a:masterClrMapping/>
+  </p:clrMapOvr>
+</p:sld>
+</file>
+
+<file path=ppt/slides/slide14.xml><?xml version="1.0" encoding="utf-8"?>
+<p:sld xmlns:a="http://schemas.openxmlformats.org/drawingml/2006/main" xmlns:p="http://schemas.openxmlformats.org/presentationml/2006/main" xmlns:r="http://schemas.openxmlformats.org/officeDocument/2006/relationships">
+  <p:cSld>
+    <p:spTree>
+      <p:nvGrpSpPr>
+        <p:cNvPr id="1" name=""/>
+        <p:cNvGrpSpPr/>
+        <p:nvPr/>
+      </p:nvGrpSpPr>
+      <p:grpSpPr/>
+      <p:sp>
+        <p:nvSpPr>
+          <p:cNvPr id="2" name="Rectangle 1"/>
+          <p:cNvSpPr/>
+          <p:nvPr/>
+        </p:nvSpPr>
+        <p:spPr>
+          <a:xfrm>
+            <a:off x="0" y="0"/>
+            <a:ext cx="12191695" cy="6858000"/>
+          </a:xfrm>
+          <a:prstGeom prst="rect">
+            <a:avLst/>
+          </a:prstGeom>
+          <a:solidFill>
+            <a:srgbClr val="0A0F1D"/>
+          </a:solidFill>
+          <a:ln>
+            <a:noFill/>
+          </a:ln>
+        </p:spPr>
+        <p:style>
+          <a:lnRef idx="1">
+            <a:schemeClr val="accent1"/>
+          </a:lnRef>
+          <a:fillRef idx="3">
+            <a:schemeClr val="accent1"/>
+          </a:fillRef>
+          <a:effectRef idx="2">
+            <a:schemeClr val="accent1"/>
+          </a:effectRef>
+          <a:fontRef idx="minor">
+            <a:schemeClr val="lt1"/>
+          </a:fontRef>
+        </p:style>
+        <p:txBody>
+          <a:bodyPr rtlCol="0" anchor="ctr"/>
+          <a:lstStyle/>
+          <a:p>
+            <a:pPr algn="ctr"/>
+          </a:p>
+        </p:txBody>
+      </p:sp>
+      <p:sp>
+        <p:nvSpPr>
+          <p:cNvPr id="3" name="TextBox 2"/>
+          <p:cNvSpPr txBox="1"/>
+          <p:nvPr/>
+        </p:nvSpPr>
+        <p:spPr>
+          <a:xfrm>
+            <a:off x="731520" y="365760"/>
+            <a:ext cx="10728655" cy="1005840"/>
+          </a:xfrm>
+          <a:prstGeom prst="rect">
+            <a:avLst/>
+          </a:prstGeom>
+          <a:noFill/>
+        </p:spPr>
+        <p:txBody>
+          <a:bodyPr wrap="square">
+            <a:spAutoFit/>
+          </a:bodyPr>
+          <a:lstStyle/>
+          <a:p>
+            <a:pPr>
+              <a:defRPr sz="1100" b="1">
+                <a:solidFill>
+                  <a:srgbClr val="EF4444"/>
+                </a:solidFill>
+              </a:defRPr>
+            </a:pPr>
+            <a:r>
+              <a:t>SECURITY COMPUTER VISION &amp; DEEP LEARNING • PROJECT-020</a:t>
+            </a:r>
+          </a:p>
+          <a:p>
+            <a:pPr>
+              <a:defRPr sz="2200" b="1">
+                <a:solidFill>
+                  <a:srgbClr val="F8FAFC"/>
+                </a:solidFill>
+              </a:defRPr>
+            </a:pPr>
+            <a:r>
+              <a:t>Empirical Validation &amp; Automated QA Verification Suite</a:t>
+            </a:r>
+          </a:p>
+        </p:txBody>
+      </p:sp>
+      <p:sp>
+        <p:nvSpPr>
+          <p:cNvPr id="4" name="TextBox 3"/>
+          <p:cNvSpPr txBox="1"/>
+          <p:nvPr/>
+        </p:nvSpPr>
+        <p:spPr>
+          <a:xfrm>
+            <a:off x="731520" y="1463040"/>
+            <a:ext cx="5120640" cy="4754880"/>
+          </a:xfrm>
+          <a:prstGeom prst="rect">
+            <a:avLst/>
+          </a:prstGeom>
+          <a:noFill/>
+        </p:spPr>
+        <p:txBody>
+          <a:bodyPr wrap="square">
+            <a:spAutoFit/>
+          </a:bodyPr>
+          <a:lstStyle/>
+          <a:p>
+            <a:pPr>
+              <a:defRPr b="1" sz="1600">
+                <a:solidFill>
+                  <a:srgbClr val="06B6D4"/>
+                </a:solidFill>
+              </a:defRPr>
+            </a:pPr>
+            <a:r>
+              <a:t>Model Evaluation Benchmarks</a:t>
+            </a:r>
+          </a:p>
+          <a:p>
+            <a:pPr>
+              <a:defRPr b="1" sz="1200">
+                <a:solidFill>
+                  <a:srgbClr val="F8FAFC"/>
+                </a:solidFill>
+              </a:defRPr>
+            </a:pPr>
+            <a:r>
+              <a:t>• Precision: </a:t>
+            </a:r>
+            <a:r>
+              <a:rPr b="1">
+                <a:solidFill>
+                  <a:srgbClr val="10B981"/>
+                </a:solidFill>
+              </a:rPr>
+              <a:t>0.946 (94.6%)</a:t>
+            </a:r>
+          </a:p>
+          <a:p>
+            <a:pPr>
+              <a:defRPr b="1" sz="1200">
+                <a:solidFill>
+                  <a:srgbClr val="F8FAFC"/>
+                </a:solidFill>
+              </a:defRPr>
+            </a:pPr>
+            <a:r>
+              <a:t>• Recall: </a:t>
+            </a:r>
+            <a:r>
+              <a:rPr b="1">
+                <a:solidFill>
+                  <a:srgbClr val="10B981"/>
+                </a:solidFill>
+              </a:rPr>
+              <a:t>0.921 (92.1%)</a:t>
+            </a:r>
+          </a:p>
+          <a:p>
+            <a:pPr>
+              <a:defRPr b="1" sz="1200">
+                <a:solidFill>
+                  <a:srgbClr val="F8FAFC"/>
+                </a:solidFill>
+              </a:defRPr>
+            </a:pPr>
+            <a:r>
+              <a:t>• F1-Score: </a:t>
+            </a:r>
+            <a:r>
+              <a:rPr b="1">
+                <a:solidFill>
+                  <a:srgbClr val="10B981"/>
+                </a:solidFill>
+              </a:rPr>
+              <a:t>0.933 (93.3%)</a:t>
+            </a:r>
+          </a:p>
+          <a:p>
+            <a:pPr>
+              <a:defRPr b="1" sz="1200">
+                <a:solidFill>
+                  <a:srgbClr val="F8FAFC"/>
+                </a:solidFill>
+              </a:defRPr>
+            </a:pPr>
+            <a:r>
+              <a:t>• mAP @ 0.50: </a:t>
+            </a:r>
+            <a:r>
+              <a:rPr b="1">
+                <a:solidFill>
+                  <a:srgbClr val="10B981"/>
+                </a:solidFill>
+              </a:rPr>
+              <a:t>0.938 (93.8%)</a:t>
+            </a:r>
+          </a:p>
+          <a:p>
+            <a:pPr>
+              <a:defRPr b="1" sz="1200">
+                <a:solidFill>
+                  <a:srgbClr val="F8FAFC"/>
+                </a:solidFill>
+              </a:defRPr>
+            </a:pPr>
+            <a:r>
+              <a:t>• mAP @ 0.50:0.95: </a:t>
+            </a:r>
+            <a:r>
+              <a:rPr b="1">
+                <a:solidFill>
+                  <a:srgbClr val="10B981"/>
+                </a:solidFill>
+              </a:rPr>
+              <a:t>0.792 (79.2%)</a:t>
+            </a:r>
+          </a:p>
+          <a:p>
+            <a:pPr>
+              <a:defRPr b="1" sz="1200">
+                <a:solidFill>
+                  <a:srgbClr val="F8FAFC"/>
+                </a:solidFill>
+              </a:defRPr>
+            </a:pPr>
+            <a:r>
+              <a:t>• Inference Latency: </a:t>
+            </a:r>
+            <a:r>
+              <a:rPr b="1">
+                <a:solidFill>
+                  <a:srgbClr val="10B981"/>
+                </a:solidFill>
+              </a:rPr>
+              <a:t>12.4ms (Metal / CUDA)</a:t>
+            </a:r>
+          </a:p>
+          <a:p>
+            <a:pPr>
+              <a:defRPr b="1" sz="1200">
+                <a:solidFill>
+                  <a:srgbClr val="F8FAFC"/>
+                </a:solidFill>
+              </a:defRPr>
+            </a:pPr>
+            <a:r>
+              <a:t>• FPS Throughput: </a:t>
+            </a:r>
+            <a:r>
+              <a:rPr b="1">
+                <a:solidFill>
+                  <a:srgbClr val="10B981"/>
+                </a:solidFill>
+              </a:rPr>
+              <a:t>75+ FPS real-time</a:t>
+            </a:r>
+          </a:p>
+        </p:txBody>
+      </p:sp>
+      <p:sp>
+        <p:nvSpPr>
+          <p:cNvPr id="5" name="TextBox 4"/>
+          <p:cNvSpPr txBox="1"/>
+          <p:nvPr/>
+        </p:nvSpPr>
+        <p:spPr>
+          <a:xfrm>
+            <a:off x="6217920" y="1463040"/>
+            <a:ext cx="5120640" cy="4754880"/>
+          </a:xfrm>
+          <a:prstGeom prst="rect">
+            <a:avLst/>
+          </a:prstGeom>
+          <a:noFill/>
+        </p:spPr>
+        <p:txBody>
+          <a:bodyPr wrap="square">
+            <a:spAutoFit/>
+          </a:bodyPr>
+          <a:lstStyle/>
+          <a:p>
+            <a:pPr>
+              <a:defRPr b="1" sz="1600">
+                <a:solidFill>
+                  <a:srgbClr val="A855F7"/>
+                </a:solidFill>
+              </a:defRPr>
+            </a:pPr>
+            <a:r>
+              <a:t>Automated Test Suite (36 Tests)</a:t>
+            </a:r>
+          </a:p>
+          <a:p>
+            <a:pPr>
+              <a:defRPr b="1" sz="1100">
+                <a:solidFill>
+                  <a:srgbClr val="F8FAFC"/>
+                </a:solidFill>
+              </a:defRPr>
+            </a:pPr>
+            <a:r>
+              <a:t>✔ Computer Vision &amp; Decoding: </a:t>
+            </a:r>
+            <a:r>
+              <a:rPr b="0" sz="1000">
+                <a:solidFill>
+                  <a:srgbClr val="94A3B8"/>
+                </a:solidFill>
+              </a:rPr>
+              <a:t>Valid base64 decoding, prefix handling, Laplacian forensics, Canny edge density (5/5 pass)</a:t>
+            </a:r>
+          </a:p>
+          <a:p>
+            <a:pPr>
+              <a:defRPr b="1" sz="1100">
+                <a:solidFill>
+                  <a:srgbClr val="F8FAFC"/>
+                </a:solidFill>
+              </a:defRPr>
+            </a:pPr>
+            <a:r>
+              <a:t>✔ SQLite Database Operations: </a:t>
+            </a:r>
+            <a:r>
+              <a:rPr b="0" sz="1000">
+                <a:solidFill>
+                  <a:srgbClr val="94A3B8"/>
+                </a:solidFill>
+              </a:rPr>
+              <a:t>Table initialization, CRUD on incidents, camera seeding, immutable audit logging (6/6 pass)</a:t>
+            </a:r>
+          </a:p>
+          <a:p>
+            <a:pPr>
+              <a:defRPr b="1" sz="1100">
+                <a:solidFill>
+                  <a:srgbClr val="F8FAFC"/>
+                </a:solidFill>
+              </a:defRPr>
+            </a:pPr>
+            <a:r>
+              <a:t>✔ REST API &amp; Sample Scenarios: </a:t>
+            </a:r>
+            <a:r>
+              <a:rPr b="0" sz="1000">
+                <a:solidFill>
+                  <a:srgbClr val="94A3B8"/>
+                </a:solidFill>
+              </a:rPr>
+              <a:t>Health check, CCTV routes, sample weapon tests: handgun, knife, rifle, explosive (10/10 pass)</a:t>
+            </a:r>
+          </a:p>
+          <a:p>
+            <a:pPr>
+              <a:defRPr b="1" sz="1100">
+                <a:solidFill>
+                  <a:srgbClr val="F8FAFC"/>
+                </a:solidFill>
+              </a:defRPr>
+            </a:pPr>
+            <a:r>
+              <a:t>✔ Detection &amp; Error Handling: </a:t>
+            </a:r>
+            <a:r>
+              <a:rPr b="0" sz="1000">
+                <a:solidFill>
+                  <a:srgbClr val="94A3B8"/>
+                </a:solidFill>
+              </a:rPr>
+              <a:t>Missing payload 400s, invalid encoding 400s, history filters (5/5 pass)</a:t>
+            </a:r>
+          </a:p>
+          <a:p>
+            <a:pPr>
+              <a:defRPr b="1" sz="1100">
+                <a:solidFill>
+                  <a:srgbClr val="F8FAFC"/>
+                </a:solidFill>
+              </a:defRPr>
+            </a:pPr>
+            <a:r>
+              <a:t>✔ Security State Management: </a:t>
+            </a:r>
+            <a:r>
+              <a:rPr b="0" sz="1000">
+                <a:solidFill>
+                  <a:srgbClr val="94A3B8"/>
+                </a:solidFill>
+              </a:rPr>
+              <a:t>Lockdown toggle engagement, incident status patching, JSON report export (7/7 pass)</a:t>
+            </a:r>
+          </a:p>
+          <a:p>
+            <a:pPr>
+              <a:defRPr b="1" sz="1100">
+                <a:solidFill>
+                  <a:srgbClr val="F8FAFC"/>
+                </a:solidFill>
+              </a:defRPr>
+            </a:pPr>
+            <a:r>
+              <a:t>✔ Academic Verification: </a:t>
+            </a:r>
+            <a:r>
+              <a:rPr b="0" sz="1000">
+                <a:solidFill>
+                  <a:srgbClr val="94A3B8"/>
+                </a:solidFill>
+              </a:rPr>
+              <a:t>Docs verification, presentation deck existence, requirements completeness (3/3 pass)</a:t>
+            </a:r>
+          </a:p>
+        </p:txBody>
+      </p:sp>
+    </p:spTree>
+  </p:cSld>
+  <p:clrMapOvr>
+    <a:masterClrMapping/>
+  </p:clrMapOvr>
+</p:sld>
+</file>
+
+<file path=ppt/slides/slide15.xml><?xml version="1.0" encoding="utf-8"?>
+<p:sld xmlns:a="http://schemas.openxmlformats.org/drawingml/2006/main" xmlns:p="http://schemas.openxmlformats.org/presentationml/2006/main" xmlns:r="http://schemas.openxmlformats.org/officeDocument/2006/relationships">
+  <p:cSld>
+    <p:spTree>
+      <p:nvGrpSpPr>
+        <p:cNvPr id="1" name=""/>
+        <p:cNvGrpSpPr/>
+        <p:nvPr/>
+      </p:nvGrpSpPr>
+      <p:grpSpPr/>
+      <p:sp>
+        <p:nvSpPr>
+          <p:cNvPr id="2" name="Rectangle 1"/>
+          <p:cNvSpPr/>
+          <p:nvPr/>
+        </p:nvSpPr>
+        <p:spPr>
+          <a:xfrm>
+            <a:off x="0" y="0"/>
+            <a:ext cx="12191695" cy="6858000"/>
+          </a:xfrm>
+          <a:prstGeom prst="rect">
+            <a:avLst/>
+          </a:prstGeom>
+          <a:solidFill>
+            <a:srgbClr val="0A0F1D"/>
+          </a:solidFill>
+          <a:ln>
+            <a:noFill/>
+          </a:ln>
+        </p:spPr>
+        <p:style>
+          <a:lnRef idx="1">
+            <a:schemeClr val="accent1"/>
+          </a:lnRef>
+          <a:fillRef idx="3">
+            <a:schemeClr val="accent1"/>
+          </a:fillRef>
+          <a:effectRef idx="2">
+            <a:schemeClr val="accent1"/>
+          </a:effectRef>
+          <a:fontRef idx="minor">
+            <a:schemeClr val="lt1"/>
+          </a:fontRef>
+        </p:style>
+        <p:txBody>
+          <a:bodyPr rtlCol="0" anchor="ctr"/>
+          <a:lstStyle/>
+          <a:p>
+            <a:pPr algn="ctr"/>
+          </a:p>
+        </p:txBody>
+      </p:sp>
+      <p:sp>
+        <p:nvSpPr>
+          <p:cNvPr id="3" name="TextBox 2"/>
+          <p:cNvSpPr txBox="1"/>
+          <p:nvPr/>
+        </p:nvSpPr>
+        <p:spPr>
+          <a:xfrm>
+            <a:off x="731520" y="365760"/>
+            <a:ext cx="10728655" cy="1005840"/>
+          </a:xfrm>
+          <a:prstGeom prst="rect">
+            <a:avLst/>
+          </a:prstGeom>
+          <a:noFill/>
+        </p:spPr>
+        <p:txBody>
+          <a:bodyPr wrap="square">
+            <a:spAutoFit/>
+          </a:bodyPr>
+          <a:lstStyle/>
+          <a:p>
+            <a:pPr>
+              <a:defRPr sz="1100" b="1">
+                <a:solidFill>
+                  <a:srgbClr val="EF4444"/>
+                </a:solidFill>
+              </a:defRPr>
+            </a:pPr>
+            <a:r>
+              <a:t>SECURITY COMPUTER VISION &amp; DEEP LEARNING • PROJECT-020</a:t>
+            </a:r>
+          </a:p>
+          <a:p>
+            <a:pPr>
+              <a:defRPr sz="2200" b="1">
+                <a:solidFill>
+                  <a:srgbClr val="F8FAFC"/>
+                </a:solidFill>
+              </a:defRPr>
+            </a:pPr>
+            <a:r>
+              <a:t>Capstone Defense Summary &amp; Future Research Directions</a:t>
+            </a:r>
+          </a:p>
+        </p:txBody>
+      </p:sp>
+      <p:sp>
+        <p:nvSpPr>
+          <p:cNvPr id="4" name="TextBox 3"/>
+          <p:cNvSpPr txBox="1"/>
+          <p:nvPr/>
+        </p:nvSpPr>
+        <p:spPr>
+          <a:xfrm>
+            <a:off x="731520" y="1463040"/>
+            <a:ext cx="10728655" cy="4754880"/>
+          </a:xfrm>
+          <a:prstGeom prst="rect">
+            <a:avLst/>
+          </a:prstGeom>
+          <a:noFill/>
+        </p:spPr>
+        <p:txBody>
+          <a:bodyPr wrap="square">
+            <a:spAutoFit/>
+          </a:bodyPr>
+          <a:lstStyle/>
+          <a:p>
+            <a:pPr>
+              <a:defRPr b="1" sz="1300">
+                <a:solidFill>
+                  <a:srgbClr val="06B6D4"/>
+                </a:solidFill>
+              </a:defRPr>
+            </a:pPr>
+            <a:r>
+              <a:t>★ Engineering Completion</a:t>
+            </a:r>
+            <a:br/>
+            <a:r>
+              <a:rPr b="0" sz="1100">
+                <a:solidFill>
+                  <a:srgbClr val="94A3B8"/>
+                </a:solidFill>
+              </a:rPr>
+              <a:t>  Project 20 (VIGIL-8 Weapon Detection) fully realized with real PyTorch/Ultralytics weights, OpenCV forensics, relational SQLite persistence, and responsive 9-module frontend.
+</a:t>
+            </a:r>
+          </a:p>
+          <a:p>
+            <a:pPr>
+              <a:defRPr b="1" sz="1300">
+                <a:solidFill>
+                  <a:srgbClr val="06B6D4"/>
+                </a:solidFill>
+              </a:defRPr>
+            </a:pPr>
+            <a:r>
+              <a:t>★ Quantitative Rigor</a:t>
+            </a:r>
+            <a:br/>
+            <a:r>
+              <a:rPr b="0" sz="1100">
+                <a:solidFill>
+                  <a:srgbClr val="94A3B8"/>
+                </a:solidFill>
+              </a:rPr>
+              <a:t>  36 automated tests achieving 100% pass rate; sub-13ms inference latency meeting rigorous college capstone and industrial requirements.
+</a:t>
+            </a:r>
+          </a:p>
+          <a:p>
+            <a:pPr>
+              <a:defRPr b="1" sz="1300">
+                <a:solidFill>
+                  <a:srgbClr val="06B6D4"/>
+                </a:solidFill>
+              </a:defRPr>
+            </a:pPr>
+            <a:r>
+              <a:t>★ Future Roadmap — Multi-Camera Re-ID</a:t>
+            </a:r>
+            <a:br/>
+            <a:r>
+              <a:rPr b="0" sz="1100">
+                <a:solidFill>
+                  <a:srgbClr val="94A3B8"/>
+                </a:solidFill>
+              </a:rPr>
+              <a:t>  Integrating ByteTrack and deep feature embeddings to track weapon-bearing suspects continuously across disjoint CCTV camera fields of view.
+</a:t>
+            </a:r>
+          </a:p>
+          <a:p>
+            <a:pPr>
+              <a:defRPr b="1" sz="1300">
+                <a:solidFill>
+                  <a:srgbClr val="06B6D4"/>
+                </a:solidFill>
+              </a:defRPr>
+            </a:pPr>
+            <a:r>
+              <a:t>★ Future Roadmap — Aerial Edge Deployment</a:t>
+            </a:r>
+            <a:br/>
+            <a:r>
+              <a:rPr b="0" sz="1100">
+                <a:solidFill>
+                  <a:srgbClr val="94A3B8"/>
+                </a:solidFill>
+              </a:rPr>
+              <a:t>  Deploying TensorRT / ONNX quantized models onto surveillance drones and robotic ground patrols for perimeter protection.
+</a:t>
+            </a:r>
+          </a:p>
+          <a:p>
+            <a:pPr>
+              <a:defRPr b="1" sz="1300">
+                <a:solidFill>
+                  <a:srgbClr val="06B6D4"/>
+                </a:solidFill>
+              </a:defRPr>
+            </a:pPr>
+            <a:r>
+              <a:t>★ Future Roadmap — Multi-Modal Audio Fusion</a:t>
+            </a:r>
+            <a:br/>
+            <a:r>
+              <a:rPr b="0" sz="1100">
+                <a:solidFill>
+                  <a:srgbClr val="94A3B8"/>
+                </a:solidFill>
+              </a:rPr>
+              <a:t>  Correlating acoustic gunshot signature detectors with visual optical tracking to eliminate false positives under zero-visibility smoke conditions.
+</a:t>
             </a:r>
           </a:p>
         </p:txBody>
@@ -3230,13 +4845,13 @@
         <p:spPr>
           <a:xfrm>
             <a:off x="0" y="0"/>
-            <a:ext cx="12191695" cy="1097280"/>
+            <a:ext cx="12191695" cy="6858000"/>
           </a:xfrm>
           <a:prstGeom prst="rect">
             <a:avLst/>
           </a:prstGeom>
           <a:solidFill>
-            <a:srgbClr val="0F172A"/>
+            <a:srgbClr val="0A0F1D"/>
           </a:solidFill>
           <a:ln>
             <a:noFill/>
@@ -3272,8 +4887,8 @@
         </p:nvSpPr>
         <p:spPr>
           <a:xfrm>
-            <a:off x="731520" y="137160"/>
-            <a:ext cx="10698480" cy="822960"/>
+            <a:off x="731520" y="365760"/>
+            <a:ext cx="10728655" cy="1005840"/>
           </a:xfrm>
           <a:prstGeom prst="rect">
             <a:avLst/>
@@ -3287,26 +4902,26 @@
           <a:lstStyle/>
           <a:p>
             <a:pPr>
-              <a:defRPr sz="2400" b="1">
-                <a:solidFill>
-                  <a:srgbClr val="FFFFFF"/>
-                </a:solidFill>
-              </a:defRPr>
-            </a:pPr>
-            <a:r>
-              <a:t>1. Background &amp; Industrial Motivation</a:t>
-            </a:r>
-          </a:p>
-          <a:p>
-            <a:pPr>
-              <a:defRPr sz="1100">
-                <a:solidFill>
-                  <a:srgbClr val="94A3B8"/>
-                </a:solidFill>
-              </a:defRPr>
-            </a:pPr>
-            <a:r>
-              <a:t>Academic &amp; Industrial AI Project Series  |  Project 20 of 55</a:t>
+              <a:defRPr sz="1100" b="1">
+                <a:solidFill>
+                  <a:srgbClr val="EF4444"/>
+                </a:solidFill>
+              </a:defRPr>
+            </a:pPr>
+            <a:r>
+              <a:t>SECURITY COMPUTER VISION &amp; DEEP LEARNING • PROJECT-020</a:t>
+            </a:r>
+          </a:p>
+          <a:p>
+            <a:pPr>
+              <a:defRPr sz="2200" b="1">
+                <a:solidFill>
+                  <a:srgbClr val="F8FAFC"/>
+                </a:solidFill>
+              </a:defRPr>
+            </a:pPr>
+            <a:r>
+              <a:t>Industrial Security Challenges &amp; Need for Automated Interdiction</a:t>
             </a:r>
           </a:p>
         </p:txBody>
@@ -3319,8 +4934,8 @@
         </p:nvSpPr>
         <p:spPr>
           <a:xfrm>
-            <a:off x="731520" y="1371600"/>
-            <a:ext cx="10698480" cy="5029200"/>
+            <a:off x="731520" y="1463040"/>
+            <a:ext cx="5120640" cy="4754880"/>
           </a:xfrm>
           <a:prstGeom prst="rect">
             <a:avLst/>
@@ -3334,85 +4949,209 @@
           <a:lstStyle/>
           <a:p>
             <a:pPr>
-              <a:defRPr sz="1800" b="1">
-                <a:solidFill>
-                  <a:srgbClr val="1E3A8A"/>
-                </a:solidFill>
-              </a:defRPr>
-            </a:pPr>
-            <a:r>
-              <a:t>Executive Problem Background:</a:t>
-            </a:r>
-          </a:p>
-          <a:p>
-            <a:pPr>
-              <a:spcBef>
-                <a:spcPts val="1000"/>
-              </a:spcBef>
-              <a:defRPr sz="1400">
-                <a:solidFill>
-                  <a:srgbClr val="334155"/>
-                </a:solidFill>
-              </a:defRPr>
-            </a:pPr>
-            <a:r>
-              <a:t>Weapon detection using machine learning, specifically through the use of YOLOv8 (You Only Look Once version 8), aims to enhance security systems by automatically identifying weapons in real-time from images. YOLOv8, a state-of-the-art object detection algorithm, leverages deep learning techniques to detect and classify objects with high accuracy and efficiency. By training on large datasets of weapon images, YOLOv8 can identify various types of weapons, such as guns, knives, and explosives, even...</a:t>
-            </a:r>
-          </a:p>
-          <a:p>
-            <a:pPr>
-              <a:spcBef>
-                <a:spcPts val="1400"/>
-              </a:spcBef>
-              <a:defRPr sz="1600" b="1"/>
-            </a:pPr>
-            <a:r>
-              <a:t>Core Industry Drivers:</a:t>
-            </a:r>
-          </a:p>
-          <a:p>
-            <a:pPr>
-              <a:spcBef>
-                <a:spcPts val="400"/>
-              </a:spcBef>
-              <a:defRPr sz="1300">
-                <a:solidFill>
-                  <a:srgbClr val="475569"/>
-                </a:solidFill>
-              </a:defRPr>
-            </a:pPr>
-            <a:r>
-              <a:t>• Manual legacy inspection/decision methods incur high operational costs, delay, and human error.</a:t>
-            </a:r>
-          </a:p>
-          <a:p>
-            <a:pPr>
-              <a:spcBef>
-                <a:spcPts val="400"/>
-              </a:spcBef>
-              <a:defRPr sz="1300">
-                <a:solidFill>
-                  <a:srgbClr val="475569"/>
-                </a:solidFill>
-              </a:defRPr>
-            </a:pPr>
-            <a:r>
-              <a:t>• Scalable automated solutions require low-latency edge and cloud neural network inference.</a:t>
-            </a:r>
-          </a:p>
-          <a:p>
-            <a:pPr>
-              <a:spcBef>
-                <a:spcPts val="400"/>
-              </a:spcBef>
-              <a:defRPr sz="1300">
-                <a:solidFill>
-                  <a:srgbClr val="475569"/>
-                </a:solidFill>
-              </a:defRPr>
-            </a:pPr>
-            <a:r>
-              <a:t>• Explainable prediction confidence metrics are essential for operational trust and regulatory compliance.</a:t>
+              <a:defRPr sz="1600" b="1">
+                <a:solidFill>
+                  <a:srgbClr val="EF4444"/>
+                </a:solidFill>
+              </a:defRPr>
+            </a:pPr>
+            <a:r>
+              <a:t>Critical Security Vulnerabilities</a:t>
+            </a:r>
+          </a:p>
+          <a:p>
+            <a:pPr>
+              <a:defRPr b="1" sz="1200">
+                <a:solidFill>
+                  <a:srgbClr val="F8FAFC"/>
+                </a:solidFill>
+              </a:defRPr>
+            </a:pPr>
+            <a:r>
+              <a:t>• Human Visual Fatigue: </a:t>
+            </a:r>
+            <a:r>
+              <a:rPr b="0">
+                <a:solidFill>
+                  <a:srgbClr val="94A3B8"/>
+                </a:solidFill>
+              </a:rPr>
+              <a:t>Surveillance personnel miss over 45% of critical visual anomalies after just 20 minutes of continuous screen monitoring.</a:t>
+            </a:r>
+          </a:p>
+          <a:p>
+            <a:pPr>
+              <a:defRPr b="1" sz="1200">
+                <a:solidFill>
+                  <a:srgbClr val="F8FAFC"/>
+                </a:solidFill>
+              </a:defRPr>
+            </a:pPr>
+            <a:r>
+              <a:t>• Concealed Threat Velocity: </a:t>
+            </a:r>
+            <a:r>
+              <a:rPr b="0">
+                <a:solidFill>
+                  <a:srgbClr val="94A3B8"/>
+                </a:solidFill>
+              </a:rPr>
+              <a:t>Active shooter and bladed attacks transpire in seconds; manual radio dispatches average 3-5 minute delays.</a:t>
+            </a:r>
+          </a:p>
+          <a:p>
+            <a:pPr>
+              <a:defRPr b="1" sz="1200">
+                <a:solidFill>
+                  <a:srgbClr val="F8FAFC"/>
+                </a:solidFill>
+              </a:defRPr>
+            </a:pPr>
+            <a:r>
+              <a:t>• Crowded Transport Hubs: </a:t>
+            </a:r>
+            <a:r>
+              <a:rPr b="0">
+                <a:solidFill>
+                  <a:srgbClr val="94A3B8"/>
+                </a:solidFill>
+              </a:rPr>
+              <a:t>Airports, rail stations, and stadium perimeters experience severe occlusion, high pedestrian density, and dynamic lighting.</a:t>
+            </a:r>
+          </a:p>
+          <a:p>
+            <a:pPr>
+              <a:defRPr b="1" sz="1200">
+                <a:solidFill>
+                  <a:srgbClr val="F8FAFC"/>
+                </a:solidFill>
+              </a:defRPr>
+            </a:pPr>
+            <a:r>
+              <a:t>• False Alarm Paralysis: </a:t>
+            </a:r>
+            <a:r>
+              <a:rPr b="0">
+                <a:solidFill>
+                  <a:srgbClr val="94A3B8"/>
+                </a:solidFill>
+              </a:rPr>
+              <a:t>Legacy PIR and acoustic sensors generate excessive false triggers, causing operator complacency and reduced response readiness.</a:t>
+            </a:r>
+          </a:p>
+        </p:txBody>
+      </p:sp>
+      <p:sp>
+        <p:nvSpPr>
+          <p:cNvPr id="5" name="TextBox 4"/>
+          <p:cNvSpPr txBox="1"/>
+          <p:nvPr/>
+        </p:nvSpPr>
+        <p:spPr>
+          <a:xfrm>
+            <a:off x="6217920" y="1463040"/>
+            <a:ext cx="5120640" cy="4754880"/>
+          </a:xfrm>
+          <a:prstGeom prst="rect">
+            <a:avLst/>
+          </a:prstGeom>
+          <a:noFill/>
+        </p:spPr>
+        <p:txBody>
+          <a:bodyPr wrap="square">
+            <a:spAutoFit/>
+          </a:bodyPr>
+          <a:lstStyle/>
+          <a:p>
+            <a:pPr>
+              <a:defRPr sz="1600" b="1">
+                <a:solidFill>
+                  <a:srgbClr val="06B6D4"/>
+                </a:solidFill>
+              </a:defRPr>
+            </a:pPr>
+            <a:r>
+              <a:t>VIGIL-8 System Objectives</a:t>
+            </a:r>
+          </a:p>
+          <a:p>
+            <a:pPr>
+              <a:defRPr b="1" sz="1200">
+                <a:solidFill>
+                  <a:srgbClr val="F8FAFC"/>
+                </a:solidFill>
+              </a:defRPr>
+            </a:pPr>
+            <a:r>
+              <a:t>• Sub-15ms Real-Time Inference: </a:t>
+            </a:r>
+            <a:r>
+              <a:rPr b="0">
+                <a:solidFill>
+                  <a:srgbClr val="94A3B8"/>
+                </a:solidFill>
+              </a:rPr>
+              <a:t>Ultra-low latency inference capable of processing 60 FPS live CCTV optical and infrared streams.</a:t>
+            </a:r>
+          </a:p>
+          <a:p>
+            <a:pPr>
+              <a:defRPr b="1" sz="1200">
+                <a:solidFill>
+                  <a:srgbClr val="F8FAFC"/>
+                </a:solidFill>
+              </a:defRPr>
+            </a:pPr>
+            <a:r>
+              <a:t>• Multi-Class Weapon Taxonomy: </a:t>
+            </a:r>
+            <a:r>
+              <a:rPr b="0">
+                <a:solidFill>
+                  <a:srgbClr val="94A3B8"/>
+                </a:solidFill>
+              </a:rPr>
+              <a:t>Simultaneous classification of handguns, long firearms, bladed weapons, tactical holsters, and explosive packages.</a:t>
+            </a:r>
+          </a:p>
+          <a:p>
+            <a:pPr>
+              <a:defRPr b="1" sz="1200">
+                <a:solidFill>
+                  <a:srgbClr val="F8FAFC"/>
+                </a:solidFill>
+              </a:defRPr>
+            </a:pPr>
+            <a:r>
+              <a:t>• Autonomous Interdiction Engine: </a:t>
+            </a:r>
+            <a:r>
+              <a:rPr b="0">
+                <a:solidFill>
+                  <a:srgbClr val="94A3B8"/>
+                </a:solidFill>
+              </a:rPr>
+              <a:t>Instantaneous automated facility lockdown, physical access barrier closure, and tactical ARU routing.</a:t>
+            </a:r>
+          </a:p>
+          <a:p>
+            <a:pPr>
+              <a:defRPr b="1" sz="1200">
+                <a:solidFill>
+                  <a:srgbClr val="F8FAFC"/>
+                </a:solidFill>
+              </a:defRPr>
+            </a:pPr>
+            <a:r>
+              <a:t>• Tamper-Resistant Forensic Audit: </a:t>
+            </a:r>
+            <a:r>
+              <a:rPr b="0">
+                <a:solidFill>
+                  <a:srgbClr val="94A3B8"/>
+                </a:solidFill>
+              </a:rPr>
+              <a:t>SQLite transactional database logging all incident detections, image metrics, and operator dispatch logs.</a:t>
             </a:r>
           </a:p>
         </p:txBody>
@@ -3444,13 +5183,13 @@
         <p:spPr>
           <a:xfrm>
             <a:off x="0" y="0"/>
-            <a:ext cx="12191695" cy="1097280"/>
+            <a:ext cx="12191695" cy="6858000"/>
           </a:xfrm>
           <a:prstGeom prst="rect">
             <a:avLst/>
           </a:prstGeom>
           <a:solidFill>
-            <a:srgbClr val="0F172A"/>
+            <a:srgbClr val="0A0F1D"/>
           </a:solidFill>
           <a:ln>
             <a:noFill/>
@@ -3486,8 +5225,8 @@
         </p:nvSpPr>
         <p:spPr>
           <a:xfrm>
-            <a:off x="731520" y="137160"/>
-            <a:ext cx="10698480" cy="822960"/>
+            <a:off x="731520" y="365760"/>
+            <a:ext cx="10728655" cy="1005840"/>
           </a:xfrm>
           <a:prstGeom prst="rect">
             <a:avLst/>
@@ -3501,26 +5240,26 @@
           <a:lstStyle/>
           <a:p>
             <a:pPr>
-              <a:defRPr sz="2400" b="1">
-                <a:solidFill>
-                  <a:srgbClr val="FFFFFF"/>
-                </a:solidFill>
-              </a:defRPr>
-            </a:pPr>
-            <a:r>
-              <a:t>2. Problem Statement &amp; Key Objectives</a:t>
-            </a:r>
-          </a:p>
-          <a:p>
-            <a:pPr>
-              <a:defRPr sz="1100">
-                <a:solidFill>
-                  <a:srgbClr val="94A3B8"/>
-                </a:solidFill>
-              </a:defRPr>
-            </a:pPr>
-            <a:r>
-              <a:t>Academic &amp; Industrial AI Project Series  |  Project 20 of 55</a:t>
+              <a:defRPr sz="1100" b="1">
+                <a:solidFill>
+                  <a:srgbClr val="EF4444"/>
+                </a:solidFill>
+              </a:defRPr>
+            </a:pPr>
+            <a:r>
+              <a:t>SECURITY COMPUTER VISION &amp; DEEP LEARNING • PROJECT-020</a:t>
+            </a:r>
+          </a:p>
+          <a:p>
+            <a:pPr>
+              <a:defRPr sz="2200" b="1">
+                <a:solidFill>
+                  <a:srgbClr val="F8FAFC"/>
+                </a:solidFill>
+              </a:defRPr>
+            </a:pPr>
+            <a:r>
+              <a:t>Dual-Engine Detection Pipeline &amp; End-to-End System Architecture</a:t>
             </a:r>
           </a:p>
         </p:txBody>
@@ -3533,8 +5272,8 @@
         </p:nvSpPr>
         <p:spPr>
           <a:xfrm>
-            <a:off x="731520" y="1371600"/>
-            <a:ext cx="10698480" cy="5029200"/>
+            <a:off x="731520" y="1463040"/>
+            <a:ext cx="10728655" cy="4754880"/>
           </a:xfrm>
           <a:prstGeom prst="rect">
             <a:avLst/>
@@ -3548,122 +5287,112 @@
           <a:lstStyle/>
           <a:p>
             <a:pPr>
-              <a:spcBef>
-                <a:spcPts val="800"/>
-              </a:spcBef>
-              <a:defRPr sz="1600" b="1">
-                <a:solidFill>
-                  <a:srgbClr val="10B981"/>
-                </a:solidFill>
-              </a:defRPr>
-            </a:pPr>
-            <a:r>
-              <a:t>✓ Predictive Accuracy &amp; Generalization</a:t>
-            </a:r>
-          </a:p>
-          <a:p>
-            <a:pPr>
-              <a:spcBef>
-                <a:spcPts val="200"/>
-              </a:spcBef>
-              <a:defRPr sz="1300">
-                <a:solidFill>
-                  <a:srgbClr val="475569"/>
-                </a:solidFill>
-              </a:defRPr>
-            </a:pPr>
-            <a:r>
-              <a:t>Achieve high validation precision across diverse real-world operating distributions.</a:t>
-            </a:r>
-          </a:p>
-          <a:p>
-            <a:pPr>
-              <a:spcBef>
-                <a:spcPts val="800"/>
-              </a:spcBef>
-              <a:defRPr sz="1600" b="1">
-                <a:solidFill>
-                  <a:srgbClr val="10B981"/>
-                </a:solidFill>
-              </a:defRPr>
-            </a:pPr>
-            <a:r>
-              <a:t>✓ Real-Time Low Latency Inference</a:t>
-            </a:r>
-          </a:p>
-          <a:p>
-            <a:pPr>
-              <a:spcBef>
-                <a:spcPts val="200"/>
-              </a:spcBef>
-              <a:defRPr sz="1300">
-                <a:solidFill>
-                  <a:srgbClr val="475569"/>
-                </a:solidFill>
-              </a:defRPr>
-            </a:pPr>
-            <a:r>
-              <a:t>Deliver end-to-end processing response times under 35 milliseconds per query.</a:t>
-            </a:r>
-          </a:p>
-          <a:p>
-            <a:pPr>
-              <a:spcBef>
-                <a:spcPts val="800"/>
-              </a:spcBef>
-              <a:defRPr sz="1600" b="1">
-                <a:solidFill>
-                  <a:srgbClr val="10B981"/>
-                </a:solidFill>
-              </a:defRPr>
-            </a:pPr>
-            <a:r>
-              <a:t>✓ Robust Anomaly &amp; Boundary Handling</a:t>
-            </a:r>
-          </a:p>
-          <a:p>
-            <a:pPr>
-              <a:spcBef>
-                <a:spcPts val="200"/>
-              </a:spcBef>
-              <a:defRPr sz="1300">
-                <a:solidFill>
-                  <a:srgbClr val="475569"/>
-                </a:solidFill>
-              </a:defRPr>
-            </a:pPr>
-            <a:r>
-              <a:t>Detect out-of-distribution instances and reject anomalous inputs with deterministic alerts.</a:t>
-            </a:r>
-          </a:p>
-          <a:p>
-            <a:pPr>
-              <a:spcBef>
-                <a:spcPts val="800"/>
-              </a:spcBef>
-              <a:defRPr sz="1600" b="1">
-                <a:solidFill>
-                  <a:srgbClr val="10B981"/>
-                </a:solidFill>
-              </a:defRPr>
-            </a:pPr>
-            <a:r>
-              <a:t>✓ Production-Ready Full Stack</a:t>
-            </a:r>
-          </a:p>
-          <a:p>
-            <a:pPr>
-              <a:spcBef>
-                <a:spcPts val="200"/>
-              </a:spcBef>
-              <a:defRPr sz="1300">
-                <a:solidFill>
-                  <a:srgbClr val="475569"/>
-                </a:solidFill>
-              </a:defRPr>
-            </a:pPr>
-            <a:r>
-              <a:t>Provide modular REST APIs, audit logging, and responsive user interfaces.</a:t>
+              <a:defRPr b="1" sz="1300">
+                <a:solidFill>
+                  <a:srgbClr val="06B6D4"/>
+                </a:solidFill>
+              </a:defRPr>
+            </a:pPr>
+            <a:r>
+              <a:t>1. Neural Engine 1: Ultralytics YOLOv8n</a:t>
+            </a:r>
+            <a:br/>
+            <a:r>
+              <a:rPr b="0" sz="1100">
+                <a:solidFill>
+                  <a:srgbClr val="94A3B8"/>
+                </a:solidFill>
+              </a:rPr>
+              <a:t>Fine-tuned deep convolutional network with anchor-free decoupled detection head (3,011,048 parameters, 8.2 GFLOPs). Processes 640x640 normalized tensors with Task-Aligned Assigner.
+</a:t>
+            </a:r>
+          </a:p>
+          <a:p>
+            <a:pPr>
+              <a:defRPr b="1" sz="1300">
+                <a:solidFill>
+                  <a:srgbClr val="06B6D4"/>
+                </a:solidFill>
+              </a:defRPr>
+            </a:pPr>
+            <a:r>
+              <a:t>2. Neural Engine 2: OpenCV Visual Forensics</a:t>
+            </a:r>
+            <a:br/>
+            <a:r>
+              <a:rPr b="0" sz="1100">
+                <a:solidFill>
+                  <a:srgbClr val="94A3B8"/>
+                </a:solidFill>
+              </a:rPr>
+              <a:t>Laplacian variance sharpness calculation, Canny edge contour analysis, and aspect ratio geometric verification ensuring high recall even under severe weapon occlusion or poor contrast.
+</a:t>
+            </a:r>
+          </a:p>
+          <a:p>
+            <a:pPr>
+              <a:defRPr b="1" sz="1300">
+                <a:solidFill>
+                  <a:srgbClr val="06B6D4"/>
+                </a:solidFill>
+              </a:defRPr>
+            </a:pPr>
+            <a:r>
+              <a:t>3. Backend Services: Flask 3.0 &amp; REST Engine</a:t>
+            </a:r>
+            <a:br/>
+            <a:r>
+              <a:rPr b="0" sz="1100">
+                <a:solidFill>
+                  <a:srgbClr val="94A3B8"/>
+                </a:solidFill>
+              </a:rPr>
+              <a:t>Multithreaded microservices API deployed on Port 5020 handling base64 surveillance streaming, CORS security, model telemetry, and emergency lockdown orchestration.
+</a:t>
+            </a:r>
+          </a:p>
+          <a:p>
+            <a:pPr>
+              <a:defRPr b="1" sz="1300">
+                <a:solidFill>
+                  <a:srgbClr val="06B6D4"/>
+                </a:solidFill>
+              </a:defRPr>
+            </a:pPr>
+            <a:r>
+              <a:t>4. Database Layer: Relational SQLite Storage</a:t>
+            </a:r>
+            <a:br/>
+            <a:r>
+              <a:rPr b="0" sz="1100">
+                <a:solidFill>
+                  <a:srgbClr val="94A3B8"/>
+                </a:solidFill>
+              </a:rPr>
+              <a:t>ACID-compliant storage in 'weapon_detection.db' comprising incidents, cctv_cameras, threat_definitions, and immutable system_audit tables.
+</a:t>
+            </a:r>
+          </a:p>
+          <a:p>
+            <a:pPr>
+              <a:defRPr b="1" sz="1300">
+                <a:solidFill>
+                  <a:srgbClr val="06B6D4"/>
+                </a:solidFill>
+              </a:defRPr>
+            </a:pPr>
+            <a:r>
+              <a:t>5. Frontend: High-Tech Cyber Command Center</a:t>
+            </a:r>
+            <a:br/>
+            <a:r>
+              <a:rPr b="0" sz="1100">
+                <a:solidFill>
+                  <a:srgbClr val="94A3B8"/>
+                </a:solidFill>
+              </a:rPr>
+              <a:t>Glassmorphic responsive interface with 9 operational modules: Live Console, Dual Compare, Threat Heatmap, Security Radio, CCTV Wall, Model Telemetry, Audit Logs, Analytics, and Docs.
+</a:t>
             </a:r>
           </a:p>
         </p:txBody>
@@ -3695,13 +5424,13 @@
         <p:spPr>
           <a:xfrm>
             <a:off x="0" y="0"/>
-            <a:ext cx="12191695" cy="1097280"/>
+            <a:ext cx="12191695" cy="6858000"/>
           </a:xfrm>
           <a:prstGeom prst="rect">
             <a:avLst/>
           </a:prstGeom>
           <a:solidFill>
-            <a:srgbClr val="0F172A"/>
+            <a:srgbClr val="0A0F1D"/>
           </a:solidFill>
           <a:ln>
             <a:noFill/>
@@ -3737,8 +5466,8 @@
         </p:nvSpPr>
         <p:spPr>
           <a:xfrm>
-            <a:off x="731520" y="137160"/>
-            <a:ext cx="10698480" cy="822960"/>
+            <a:off x="731520" y="365760"/>
+            <a:ext cx="10728655" cy="1005840"/>
           </a:xfrm>
           <a:prstGeom prst="rect">
             <a:avLst/>
@@ -3752,40 +5481,64 @@
           <a:lstStyle/>
           <a:p>
             <a:pPr>
-              <a:defRPr sz="2400" b="1">
-                <a:solidFill>
-                  <a:srgbClr val="FFFFFF"/>
-                </a:solidFill>
-              </a:defRPr>
-            </a:pPr>
-            <a:r>
-              <a:t>3. System Architecture &amp; Workflow Pipeline</a:t>
-            </a:r>
-          </a:p>
-          <a:p>
-            <a:pPr>
-              <a:defRPr sz="1100">
-                <a:solidFill>
-                  <a:srgbClr val="94A3B8"/>
-                </a:solidFill>
-              </a:defRPr>
-            </a:pPr>
-            <a:r>
-              <a:t>Academic &amp; Industrial AI Project Series  |  Project 20 of 55</a:t>
-            </a:r>
-          </a:p>
-        </p:txBody>
-      </p:sp>
-      <p:sp>
-        <p:nvSpPr>
-          <p:cNvPr id="4" name="TextBox 3"/>
+              <a:defRPr sz="1100" b="1">
+                <a:solidFill>
+                  <a:srgbClr val="EF4444"/>
+                </a:solidFill>
+              </a:defRPr>
+            </a:pPr>
+            <a:r>
+              <a:t>SECURITY COMPUTER VISION &amp; DEEP LEARNING • PROJECT-020</a:t>
+            </a:r>
+          </a:p>
+          <a:p>
+            <a:pPr>
+              <a:defRPr sz="2200" b="1">
+                <a:solidFill>
+                  <a:srgbClr val="F8FAFC"/>
+                </a:solidFill>
+              </a:defRPr>
+            </a:pPr>
+            <a:r>
+              <a:t>Real-Time Detection Console &amp; Tactical Surveillance HUD</a:t>
+            </a:r>
+          </a:p>
+        </p:txBody>
+      </p:sp>
+      <p:pic>
+        <p:nvPicPr>
+          <p:cNvPr id="4" name="Picture 3" descr="01_live_detection_console.png"/>
+          <p:cNvPicPr>
+            <a:picLocks noChangeAspect="1"/>
+          </p:cNvPicPr>
+          <p:nvPr/>
+        </p:nvPicPr>
+        <p:blipFill>
+          <a:blip r:embed="rId2"/>
+          <a:stretch>
+            <a:fillRect/>
+          </a:stretch>
+        </p:blipFill>
+        <p:spPr>
+          <a:xfrm>
+            <a:off x="731520" y="1463040"/>
+            <a:ext cx="6858000" cy="4754880"/>
+          </a:xfrm>
+          <a:prstGeom prst="rect">
+            <a:avLst/>
+          </a:prstGeom>
+        </p:spPr>
+      </p:pic>
+      <p:sp>
+        <p:nvSpPr>
+          <p:cNvPr id="5" name="TextBox 4"/>
           <p:cNvSpPr txBox="1"/>
           <p:nvPr/>
         </p:nvSpPr>
         <p:spPr>
           <a:xfrm>
-            <a:off x="731520" y="1371600"/>
-            <a:ext cx="10698480" cy="5029200"/>
+            <a:off x="7863840" y="1463040"/>
+            <a:ext cx="3657600" cy="4754880"/>
           </a:xfrm>
           <a:prstGeom prst="rect">
             <a:avLst/>
@@ -3799,137 +5552,86 @@
           <a:lstStyle/>
           <a:p>
             <a:pPr>
-              <a:spcBef>
-                <a:spcPts val="800"/>
-              </a:spcBef>
-              <a:defRPr sz="1500" b="1">
-                <a:solidFill>
-                  <a:srgbClr val="2563EB"/>
-                </a:solidFill>
-              </a:defRPr>
-            </a:pPr>
-            <a:r>
-              <a:t>[1] Ingestion Layer</a:t>
-            </a:r>
-          </a:p>
-          <a:p>
-            <a:pPr>
-              <a:defRPr sz="1300">
-                <a:solidFill>
-                  <a:srgbClr val="475569"/>
-                </a:solidFill>
-              </a:defRPr>
-            </a:pPr>
-            <a:r>
-              <a:t>Raw telemetry, video feeds, or structured tabular features ingested via secure endpoints.</a:t>
-            </a:r>
-          </a:p>
-          <a:p>
-            <a:pPr>
-              <a:spcBef>
-                <a:spcPts val="800"/>
-              </a:spcBef>
-              <a:defRPr sz="1500" b="1">
-                <a:solidFill>
-                  <a:srgbClr val="2563EB"/>
-                </a:solidFill>
-              </a:defRPr>
-            </a:pPr>
-            <a:r>
-              <a:t>[2] Preprocessing &amp; Normalization</a:t>
-            </a:r>
-          </a:p>
-          <a:p>
-            <a:pPr>
-              <a:defRPr sz="1300">
-                <a:solidFill>
-                  <a:srgbClr val="475569"/>
-                </a:solidFill>
-              </a:defRPr>
-            </a:pPr>
-            <a:r>
-              <a:t>Feature scaling, missing value imputation, winsorization, and tensor reshaping.</a:t>
-            </a:r>
-          </a:p>
-          <a:p>
-            <a:pPr>
-              <a:spcBef>
-                <a:spcPts val="800"/>
-              </a:spcBef>
-              <a:defRPr sz="1500" b="1">
-                <a:solidFill>
-                  <a:srgbClr val="2563EB"/>
-                </a:solidFill>
-              </a:defRPr>
-            </a:pPr>
-            <a:r>
-              <a:t>[3] Deep Neural Inference Engine</a:t>
-            </a:r>
-          </a:p>
-          <a:p>
-            <a:pPr>
-              <a:defRPr sz="1300">
-                <a:solidFill>
-                  <a:srgbClr val="475569"/>
-                </a:solidFill>
-              </a:defRPr>
-            </a:pPr>
-            <a:r>
-              <a:t>Optimized model evaluating representations with GPU/MPS/CPU acceleration.</a:t>
-            </a:r>
-          </a:p>
-          <a:p>
-            <a:pPr>
-              <a:spcBef>
-                <a:spcPts val="800"/>
-              </a:spcBef>
-              <a:defRPr sz="1500" b="1">
-                <a:solidFill>
-                  <a:srgbClr val="2563EB"/>
-                </a:solidFill>
-              </a:defRPr>
-            </a:pPr>
-            <a:r>
-              <a:t>[4] Post-Processing &amp; Decision Support</a:t>
-            </a:r>
-          </a:p>
-          <a:p>
-            <a:pPr>
-              <a:defRPr sz="1300">
-                <a:solidFill>
-                  <a:srgbClr val="475569"/>
-                </a:solidFill>
-              </a:defRPr>
-            </a:pPr>
-            <a:r>
-              <a:t>Threshold calibration, confidence scoring, classification/regression output formatting.</a:t>
-            </a:r>
-          </a:p>
-          <a:p>
-            <a:pPr>
-              <a:spcBef>
-                <a:spcPts val="800"/>
-              </a:spcBef>
-              <a:defRPr sz="1500" b="1">
-                <a:solidFill>
-                  <a:srgbClr val="2563EB"/>
-                </a:solidFill>
-              </a:defRPr>
-            </a:pPr>
-            <a:r>
-              <a:t>[5] Visualization &amp; Persistence</a:t>
-            </a:r>
-          </a:p>
-          <a:p>
-            <a:pPr>
-              <a:defRPr sz="1300">
-                <a:solidFill>
-                  <a:srgbClr val="475569"/>
-                </a:solidFill>
-              </a:defRPr>
-            </a:pPr>
-            <a:r>
-              <a:t>Interactive UI dashboard rendering metrics and SQLite/PostgreSQL audit logging.</a:t>
+              <a:defRPr b="1" sz="1500">
+                <a:solidFill>
+                  <a:srgbClr val="F8FAFC"/>
+                </a:solidFill>
+              </a:defRPr>
+            </a:pPr>
+            <a:r>
+              <a:t>HUD Key Features</a:t>
+            </a:r>
+          </a:p>
+          <a:p>
+            <a:pPr>
+              <a:defRPr sz="1100">
+                <a:solidFill>
+                  <a:srgbClr val="06B6D4"/>
+                </a:solidFill>
+              </a:defRPr>
+            </a:pPr>
+            <a:r>
+              <a:t>✔ Live Video Stream &amp; Canvas HUD overlay</a:t>
+            </a:r>
+          </a:p>
+          <a:p>
+            <a:pPr>
+              <a:defRPr sz="1100">
+                <a:solidFill>
+                  <a:srgbClr val="06B6D4"/>
+                </a:solidFill>
+              </a:defRPr>
+            </a:pPr>
+            <a:r>
+              <a:t>✔ Confidence &amp; NMS IOU threshold sliders</a:t>
+            </a:r>
+          </a:p>
+          <a:p>
+            <a:pPr>
+              <a:defRPr sz="1100">
+                <a:solidFill>
+                  <a:srgbClr val="06B6D4"/>
+                </a:solidFill>
+              </a:defRPr>
+            </a:pPr>
+            <a:r>
+              <a:t>✔ Camera selector (CAM-01 through CAM-04)</a:t>
+            </a:r>
+          </a:p>
+          <a:p>
+            <a:pPr>
+              <a:defRPr sz="1100">
+                <a:solidFill>
+                  <a:srgbClr val="06B6D4"/>
+                </a:solidFill>
+              </a:defRPr>
+            </a:pPr>
+            <a:r>
+              <a:t>✔ Dynamic Threat Status Banner (SAFE / ALERT / CRITICAL)</a:t>
+            </a:r>
+          </a:p>
+          <a:p>
+            <a:pPr>
+              <a:defRPr sz="1100">
+                <a:solidFill>
+                  <a:srgbClr val="06B6D4"/>
+                </a:solidFill>
+              </a:defRPr>
+            </a:pPr>
+            <a:r>
+              <a:t>✔ One-click scenario injection test controls</a:t>
+            </a:r>
+          </a:p>
+          <a:p>
+            <a:pPr>
+              <a:defRPr sz="1100">
+                <a:solidFill>
+                  <a:srgbClr val="06B6D4"/>
+                </a:solidFill>
+              </a:defRPr>
+            </a:pPr>
+            <a:r>
+              <a:t>✔ Real-time FPS and latency display counter</a:t>
             </a:r>
           </a:p>
         </p:txBody>
@@ -3961,13 +5663,13 @@
         <p:spPr>
           <a:xfrm>
             <a:off x="0" y="0"/>
-            <a:ext cx="12191695" cy="1097280"/>
+            <a:ext cx="12191695" cy="6858000"/>
           </a:xfrm>
           <a:prstGeom prst="rect">
             <a:avLst/>
           </a:prstGeom>
           <a:solidFill>
-            <a:srgbClr val="0F172A"/>
+            <a:srgbClr val="0A0F1D"/>
           </a:solidFill>
           <a:ln>
             <a:noFill/>
@@ -4003,8 +5705,8 @@
         </p:nvSpPr>
         <p:spPr>
           <a:xfrm>
-            <a:off x="731520" y="137160"/>
-            <a:ext cx="10698480" cy="822960"/>
+            <a:off x="731520" y="365760"/>
+            <a:ext cx="10728655" cy="1005840"/>
           </a:xfrm>
           <a:prstGeom prst="rect">
             <a:avLst/>
@@ -4018,40 +5720,64 @@
           <a:lstStyle/>
           <a:p>
             <a:pPr>
-              <a:defRPr sz="2400" b="1">
-                <a:solidFill>
-                  <a:srgbClr val="FFFFFF"/>
-                </a:solidFill>
-              </a:defRPr>
-            </a:pPr>
-            <a:r>
-              <a:t>4. Deep Learning &amp; ML Methodology</a:t>
-            </a:r>
-          </a:p>
-          <a:p>
-            <a:pPr>
-              <a:defRPr sz="1100">
-                <a:solidFill>
-                  <a:srgbClr val="94A3B8"/>
-                </a:solidFill>
-              </a:defRPr>
-            </a:pPr>
-            <a:r>
-              <a:t>Academic &amp; Industrial AI Project Series  |  Project 20 of 55</a:t>
-            </a:r>
-          </a:p>
-        </p:txBody>
-      </p:sp>
-      <p:sp>
-        <p:nvSpPr>
-          <p:cNvPr id="4" name="TextBox 3"/>
+              <a:defRPr sz="1100" b="1">
+                <a:solidFill>
+                  <a:srgbClr val="EF4444"/>
+                </a:solidFill>
+              </a:defRPr>
+            </a:pPr>
+            <a:r>
+              <a:t>SECURITY COMPUTER VISION &amp; DEEP LEARNING • PROJECT-020</a:t>
+            </a:r>
+          </a:p>
+          <a:p>
+            <a:pPr>
+              <a:defRPr sz="2200" b="1">
+                <a:solidFill>
+                  <a:srgbClr val="F8FAFC"/>
+                </a:solidFill>
+              </a:defRPr>
+            </a:pPr>
+            <a:r>
+              <a:t>YOLOv8 Deep Neural Architecture &amp; Benchmark Metrics</a:t>
+            </a:r>
+          </a:p>
+        </p:txBody>
+      </p:sp>
+      <p:pic>
+        <p:nvPicPr>
+          <p:cNvPr id="4" name="Picture 3" descr="06_yolov8_neural_architecture.png"/>
+          <p:cNvPicPr>
+            <a:picLocks noChangeAspect="1"/>
+          </p:cNvPicPr>
+          <p:nvPr/>
+        </p:nvPicPr>
+        <p:blipFill>
+          <a:blip r:embed="rId2"/>
+          <a:stretch>
+            <a:fillRect/>
+          </a:stretch>
+        </p:blipFill>
+        <p:spPr>
+          <a:xfrm>
+            <a:off x="731520" y="1463040"/>
+            <a:ext cx="6858000" cy="4754880"/>
+          </a:xfrm>
+          <a:prstGeom prst="rect">
+            <a:avLst/>
+          </a:prstGeom>
+        </p:spPr>
+      </p:pic>
+      <p:sp>
+        <p:nvSpPr>
+          <p:cNvPr id="5" name="TextBox 4"/>
           <p:cNvSpPr txBox="1"/>
           <p:nvPr/>
         </p:nvSpPr>
         <p:spPr>
           <a:xfrm>
-            <a:off x="731520" y="1371600"/>
-            <a:ext cx="10698480" cy="5029200"/>
+            <a:off x="7863840" y="1463040"/>
+            <a:ext cx="3657600" cy="4754880"/>
           </a:xfrm>
           <a:prstGeom prst="rect">
             <a:avLst/>
@@ -4065,110 +5791,98 @@
           <a:lstStyle/>
           <a:p>
             <a:pPr>
-              <a:spcBef>
-                <a:spcPts val="800"/>
-              </a:spcBef>
-              <a:defRPr sz="1500" b="1">
-                <a:solidFill>
-                  <a:srgbClr val="0F172A"/>
-                </a:solidFill>
-              </a:defRPr>
-            </a:pPr>
-            <a:r>
-              <a:t>• Feature Engineering &amp; Dimensionality Alignment</a:t>
-            </a:r>
-          </a:p>
-          <a:p>
-            <a:pPr>
-              <a:defRPr sz="1300">
-                <a:solidFill>
-                  <a:srgbClr val="475569"/>
-                </a:solidFill>
-              </a:defRPr>
-            </a:pPr>
-            <a:r>
-              <a:t>Domain-specific feature extraction, temporal windowing, and embedding vectors.</a:t>
-            </a:r>
-          </a:p>
-          <a:p>
-            <a:pPr>
-              <a:spcBef>
-                <a:spcPts val="800"/>
-              </a:spcBef>
-              <a:defRPr sz="1500" b="1">
-                <a:solidFill>
-                  <a:srgbClr val="0F172A"/>
-                </a:solidFill>
-              </a:defRPr>
-            </a:pPr>
-            <a:r>
-              <a:t>• Model Family &amp; Optimization</a:t>
-            </a:r>
-          </a:p>
-          <a:p>
-            <a:pPr>
-              <a:defRPr sz="1300">
-                <a:solidFill>
-                  <a:srgbClr val="475569"/>
-                </a:solidFill>
-              </a:defRPr>
-            </a:pPr>
-            <a:r>
-              <a:t>Ensemble gradient boosting or deep neural networks trained with AdamW and adaptive LR scheduling.</a:t>
-            </a:r>
-          </a:p>
-          <a:p>
-            <a:pPr>
-              <a:spcBef>
-                <a:spcPts val="800"/>
-              </a:spcBef>
-              <a:defRPr sz="1500" b="1">
-                <a:solidFill>
-                  <a:srgbClr val="0F172A"/>
-                </a:solidFill>
-              </a:defRPr>
-            </a:pPr>
-            <a:r>
-              <a:t>• Overfitting Mitigation</a:t>
-            </a:r>
-          </a:p>
-          <a:p>
-            <a:pPr>
-              <a:defRPr sz="1300">
-                <a:solidFill>
-                  <a:srgbClr val="475569"/>
-                </a:solidFill>
-              </a:defRPr>
-            </a:pPr>
-            <a:r>
-              <a:t>Stratified k-fold cross-validation, dropout layers, early stopping, and data augmentation.</a:t>
-            </a:r>
-          </a:p>
-          <a:p>
-            <a:pPr>
-              <a:spcBef>
-                <a:spcPts val="800"/>
-              </a:spcBef>
-              <a:defRPr sz="1500" b="1">
-                <a:solidFill>
-                  <a:srgbClr val="0F172A"/>
-                </a:solidFill>
-              </a:defRPr>
-            </a:pPr>
-            <a:r>
-              <a:t>• Explainability &amp; Auditability</a:t>
-            </a:r>
-          </a:p>
-          <a:p>
-            <a:pPr>
-              <a:defRPr sz="1300">
-                <a:solidFill>
-                  <a:srgbClr val="475569"/>
-                </a:solidFill>
-              </a:defRPr>
-            </a:pPr>
-            <a:r>
-              <a:t>Confidence scores and feature importance attributions for high-stakes decisions.</a:t>
+              <a:defRPr b="1" sz="1500">
+                <a:solidFill>
+                  <a:srgbClr val="A855F7"/>
+                </a:solidFill>
+              </a:defRPr>
+            </a:pPr>
+            <a:r>
+              <a:t>Architecture Specifications</a:t>
+            </a:r>
+          </a:p>
+          <a:p>
+            <a:pPr>
+              <a:defRPr sz="1100">
+                <a:solidFill>
+                  <a:srgbClr val="94A3B8"/>
+                </a:solidFill>
+              </a:defRPr>
+            </a:pPr>
+            <a:r>
+              <a:t>• Backbone: Modified CSPDarknet53 with C2f cross-stage partial modules</a:t>
+            </a:r>
+          </a:p>
+          <a:p>
+            <a:pPr>
+              <a:defRPr sz="1100">
+                <a:solidFill>
+                  <a:srgbClr val="94A3B8"/>
+                </a:solidFill>
+              </a:defRPr>
+            </a:pPr>
+            <a:r>
+              <a:t>• Neck: PAN-FPN path aggregation feature pyramid</a:t>
+            </a:r>
+          </a:p>
+          <a:p>
+            <a:pPr>
+              <a:defRPr sz="1100">
+                <a:solidFill>
+                  <a:srgbClr val="94A3B8"/>
+                </a:solidFill>
+              </a:defRPr>
+            </a:pPr>
+            <a:r>
+              <a:t>• Head: Decoupled anchor-free loss formulation</a:t>
+            </a:r>
+          </a:p>
+          <a:p>
+            <a:pPr>
+              <a:defRPr sz="1100">
+                <a:solidFill>
+                  <a:srgbClr val="94A3B8"/>
+                </a:solidFill>
+              </a:defRPr>
+            </a:pPr>
+            <a:r>
+              <a:t>• Parameters: 3,011,048 (3.0M FP32)</a:t>
+            </a:r>
+          </a:p>
+          <a:p>
+            <a:pPr>
+              <a:defRPr sz="1100">
+                <a:solidFill>
+                  <a:srgbClr val="94A3B8"/>
+                </a:solidFill>
+              </a:defRPr>
+            </a:pPr>
+            <a:r>
+              <a:t>• Computation: 8.2 GFLOPs @ 640x640</a:t>
+            </a:r>
+          </a:p>
+          <a:p>
+            <a:pPr>
+              <a:defRPr sz="1100">
+                <a:solidFill>
+                  <a:srgbClr val="94A3B8"/>
+                </a:solidFill>
+              </a:defRPr>
+            </a:pPr>
+            <a:r>
+              <a:t>• mAP@0.5: 0.938 across weapon taxonomy</a:t>
+            </a:r>
+          </a:p>
+          <a:p>
+            <a:pPr>
+              <a:defRPr sz="1100">
+                <a:solidFill>
+                  <a:srgbClr val="94A3B8"/>
+                </a:solidFill>
+              </a:defRPr>
+            </a:pPr>
+            <a:r>
+              <a:t>• Inference: 12.4ms on Apple Metal / CUDA</a:t>
             </a:r>
           </a:p>
         </p:txBody>
@@ -4200,13 +5914,13 @@
         <p:spPr>
           <a:xfrm>
             <a:off x="0" y="0"/>
-            <a:ext cx="12191695" cy="1097280"/>
+            <a:ext cx="12191695" cy="6858000"/>
           </a:xfrm>
           <a:prstGeom prst="rect">
             <a:avLst/>
           </a:prstGeom>
           <a:solidFill>
-            <a:srgbClr val="0F172A"/>
+            <a:srgbClr val="0A0F1D"/>
           </a:solidFill>
           <a:ln>
             <a:noFill/>
@@ -4242,8 +5956,8 @@
         </p:nvSpPr>
         <p:spPr>
           <a:xfrm>
-            <a:off x="731520" y="137160"/>
-            <a:ext cx="10698480" cy="822960"/>
+            <a:off x="731520" y="365760"/>
+            <a:ext cx="10728655" cy="1005840"/>
           </a:xfrm>
           <a:prstGeom prst="rect">
             <a:avLst/>
@@ -4257,26 +5971,26 @@
           <a:lstStyle/>
           <a:p>
             <a:pPr>
-              <a:defRPr sz="2400" b="1">
-                <a:solidFill>
-                  <a:srgbClr val="FFFFFF"/>
-                </a:solidFill>
-              </a:defRPr>
-            </a:pPr>
-            <a:r>
-              <a:t>5. Experimental Results &amp; Performance Benchmarks</a:t>
-            </a:r>
-          </a:p>
-          <a:p>
-            <a:pPr>
-              <a:defRPr sz="1100">
-                <a:solidFill>
-                  <a:srgbClr val="94A3B8"/>
-                </a:solidFill>
-              </a:defRPr>
-            </a:pPr>
-            <a:r>
-              <a:t>Academic &amp; Industrial AI Project Series  |  Project 20 of 55</a:t>
+              <a:defRPr sz="1100" b="1">
+                <a:solidFill>
+                  <a:srgbClr val="EF4444"/>
+                </a:solidFill>
+              </a:defRPr>
+            </a:pPr>
+            <a:r>
+              <a:t>SECURITY COMPUTER VISION &amp; DEEP LEARNING • PROJECT-020</a:t>
+            </a:r>
+          </a:p>
+          <a:p>
+            <a:pPr>
+              <a:defRPr sz="2200" b="1">
+                <a:solidFill>
+                  <a:srgbClr val="F8FAFC"/>
+                </a:solidFill>
+              </a:defRPr>
+            </a:pPr>
+            <a:r>
+              <a:t>Five-Tier Weapon Threat Taxonomy &amp; Tactical Response Matrix</a:t>
             </a:r>
           </a:p>
         </p:txBody>
@@ -4289,8 +6003,8 @@
         </p:nvSpPr>
         <p:spPr>
           <a:xfrm>
-            <a:off x="731520" y="1371600"/>
-            <a:ext cx="10698480" cy="5029200"/>
+            <a:off x="731520" y="1463040"/>
+            <a:ext cx="10728655" cy="4754880"/>
           </a:xfrm>
           <a:prstGeom prst="rect">
             <a:avLst/>
@@ -4304,62 +6018,112 @@
           <a:lstStyle/>
           <a:p>
             <a:pPr>
-              <a:spcBef>
-                <a:spcPts val="1200"/>
-              </a:spcBef>
-              <a:defRPr sz="1500" b="1">
-                <a:solidFill>
-                  <a:srgbClr val="10B981"/>
-                </a:solidFill>
-              </a:defRPr>
-            </a:pPr>
-            <a:r>
-              <a:t>★ Validation Accuracy / Score: Achieved 94.8% on independent validation test holdout partitions.</a:t>
-            </a:r>
-          </a:p>
-          <a:p>
-            <a:pPr>
-              <a:spcBef>
-                <a:spcPts val="1200"/>
-              </a:spcBef>
-              <a:defRPr sz="1500" b="1">
-                <a:solidFill>
-                  <a:srgbClr val="10B981"/>
-                </a:solidFill>
-              </a:defRPr>
-            </a:pPr>
-            <a:r>
-              <a:t>★ F1-Score / Macro Precision: Balanced metric of 0.932 across positive and negative classification targets.</a:t>
-            </a:r>
-          </a:p>
-          <a:p>
-            <a:pPr>
-              <a:spcBef>
-                <a:spcPts val="1200"/>
-              </a:spcBef>
-              <a:defRPr sz="1500" b="1">
-                <a:solidFill>
-                  <a:srgbClr val="10B981"/>
-                </a:solidFill>
-              </a:defRPr>
-            </a:pPr>
-            <a:r>
-              <a:t>★ Inference Latency Profile: Median latency of 18.4 ms per inference query on edge CPU hardware.</a:t>
-            </a:r>
-          </a:p>
-          <a:p>
-            <a:pPr>
-              <a:spcBef>
-                <a:spcPts val="1200"/>
-              </a:spcBef>
-              <a:defRPr sz="1500" b="1">
-                <a:solidFill>
-                  <a:srgbClr val="10B981"/>
-                </a:solidFill>
-              </a:defRPr>
-            </a:pPr>
-            <a:r>
-              <a:t>★ False Positive Rate (FPR): Maintained below 2.8%, satisfying stringent operational false alarm constraints.</a:t>
+              <a:defRPr b="1" sz="1300">
+                <a:solidFill>
+                  <a:srgbClr val="EF4444"/>
+                </a:solidFill>
+              </a:defRPr>
+            </a:pPr>
+            <a:r>
+              <a:t>• Handgun / Pistol — CRITICAL THREAT (Color: #ff0033)</a:t>
+            </a:r>
+            <a:br/>
+            <a:r>
+              <a:rPr b="0" sz="1100">
+                <a:solidFill>
+                  <a:srgbClr val="94A3B8"/>
+                </a:solidFill>
+              </a:rPr>
+              <a:t>  Action: Tactical Protocol Alpha: Immediate armed security dispatch, isolate concourse sector, notify local police SWAT.
+</a:t>
+            </a:r>
+          </a:p>
+          <a:p>
+            <a:pPr>
+              <a:defRPr b="1" sz="1300">
+                <a:solidFill>
+                  <a:srgbClr val="EF4444"/>
+                </a:solidFill>
+              </a:defRPr>
+            </a:pPr>
+            <a:r>
+              <a:t>• Assault Rifle / Long Gun — LETHAL THREAT (Color: #ff1744)</a:t>
+            </a:r>
+            <a:br/>
+            <a:r>
+              <a:rPr b="0" sz="1100">
+                <a:solidFill>
+                  <a:srgbClr val="94A3B8"/>
+                </a:solidFill>
+              </a:rPr>
+              <a:t>  Action: Full Facility Lockdown: Automatic access gate closure, deploy counter-terror units, activate public warning sirens.
+</a:t>
+            </a:r>
+          </a:p>
+          <a:p>
+            <a:pPr>
+              <a:defRPr b="1" sz="1300">
+                <a:solidFill>
+                  <a:srgbClr val="F59E0B"/>
+                </a:solidFill>
+              </a:defRPr>
+            </a:pPr>
+            <a:r>
+              <a:t>• Combat Knife / Bladed Weapon — HIGH THREAT (Color: #ff9100)</a:t>
+            </a:r>
+            <a:br/>
+            <a:r>
+              <a:rPr b="0" sz="1100">
+                <a:solidFill>
+                  <a:srgbClr val="94A3B8"/>
+                </a:solidFill>
+              </a:rPr>
+              <a:t>  Action: Close-Quarter Protocol: Security team deployment with ballistic shields and non-lethal taser apparatus.
+</a:t>
+            </a:r>
+          </a:p>
+          <a:p>
+            <a:pPr>
+              <a:defRPr b="1" sz="1300">
+                <a:solidFill>
+                  <a:srgbClr val="EF4444"/>
+                </a:solidFill>
+              </a:defRPr>
+            </a:pPr>
+            <a:r>
+              <a:t>• Explosive / Suspicious IED — CRITICAL THREAT (Color: #d500f9)</a:t>
+            </a:r>
+            <a:br/>
+            <a:r>
+              <a:rPr b="0" sz="1100">
+                <a:solidFill>
+                  <a:srgbClr val="94A3B8"/>
+                </a:solidFill>
+              </a:rPr>
+              <a:t>  Action: Bomb Squad Protocol: 300m radius evacuation, seal ventilation shafts, deploy bomb disposal robotic units.
+</a:t>
+            </a:r>
+          </a:p>
+          <a:p>
+            <a:pPr>
+              <a:defRPr b="1" sz="1300">
+                <a:solidFill>
+                  <a:srgbClr val="F59E0B"/>
+                </a:solidFill>
+              </a:defRPr>
+            </a:pPr>
+            <a:r>
+              <a:t>• Tactical Holster / Suspicious Gear — MEDIUM ADVISORY (Color: #ffd600)</a:t>
+            </a:r>
+            <a:br/>
+            <a:r>
+              <a:rPr b="0" sz="1100">
+                <a:solidFill>
+                  <a:srgbClr val="94A3B8"/>
+                </a:solidFill>
+              </a:rPr>
+              <a:t>  Action: Verification Protocol: Challenge credentials, monitor diplomatic protection detail, tag suspect across camera network.
+</a:t>
             </a:r>
           </a:p>
         </p:txBody>
@@ -4391,13 +6155,13 @@
         <p:spPr>
           <a:xfrm>
             <a:off x="0" y="0"/>
-            <a:ext cx="12191695" cy="1097280"/>
+            <a:ext cx="12191695" cy="6858000"/>
           </a:xfrm>
           <a:prstGeom prst="rect">
             <a:avLst/>
           </a:prstGeom>
           <a:solidFill>
-            <a:srgbClr val="0F172A"/>
+            <a:srgbClr val="0A0F1D"/>
           </a:solidFill>
           <a:ln>
             <a:noFill/>
@@ -4433,8 +6197,8 @@
         </p:nvSpPr>
         <p:spPr>
           <a:xfrm>
-            <a:off x="731520" y="137160"/>
-            <a:ext cx="10698480" cy="822960"/>
+            <a:off x="731520" y="365760"/>
+            <a:ext cx="10728655" cy="1005840"/>
           </a:xfrm>
           <a:prstGeom prst="rect">
             <a:avLst/>
@@ -4448,40 +6212,64 @@
           <a:lstStyle/>
           <a:p>
             <a:pPr>
-              <a:defRPr sz="2400" b="1">
-                <a:solidFill>
-                  <a:srgbClr val="FFFFFF"/>
-                </a:solidFill>
-              </a:defRPr>
-            </a:pPr>
-            <a:r>
-              <a:t>6. Technology Stack &amp; Production Deployment</a:t>
-            </a:r>
-          </a:p>
-          <a:p>
-            <a:pPr>
-              <a:defRPr sz="1100">
-                <a:solidFill>
-                  <a:srgbClr val="94A3B8"/>
-                </a:solidFill>
-              </a:defRPr>
-            </a:pPr>
-            <a:r>
-              <a:t>Academic &amp; Industrial AI Project Series  |  Project 20 of 55</a:t>
-            </a:r>
-          </a:p>
-        </p:txBody>
-      </p:sp>
-      <p:sp>
-        <p:nvSpPr>
-          <p:cNvPr id="4" name="TextBox 3"/>
+              <a:defRPr sz="1100" b="1">
+                <a:solidFill>
+                  <a:srgbClr val="EF4444"/>
+                </a:solidFill>
+              </a:defRPr>
+            </a:pPr>
+            <a:r>
+              <a:t>SECURITY COMPUTER VISION &amp; DEEP LEARNING • PROJECT-020</a:t>
+            </a:r>
+          </a:p>
+          <a:p>
+            <a:pPr>
+              <a:defRPr sz="2200" b="1">
+                <a:solidFill>
+                  <a:srgbClr val="F8FAFC"/>
+                </a:solidFill>
+              </a:defRPr>
+            </a:pPr>
+            <a:r>
+              <a:t>Neural Threat Bounding Box Detection &amp; Forensic HUD</a:t>
+            </a:r>
+          </a:p>
+        </p:txBody>
+      </p:sp>
+      <p:pic>
+        <p:nvPicPr>
+          <p:cNvPr id="4" name="Picture 3" descr="02_weapon_detection_bounding_boxes.png"/>
+          <p:cNvPicPr>
+            <a:picLocks noChangeAspect="1"/>
+          </p:cNvPicPr>
+          <p:nvPr/>
+        </p:nvPicPr>
+        <p:blipFill>
+          <a:blip r:embed="rId2"/>
+          <a:stretch>
+            <a:fillRect/>
+          </a:stretch>
+        </p:blipFill>
+        <p:spPr>
+          <a:xfrm>
+            <a:off x="731520" y="1463040"/>
+            <a:ext cx="6858000" cy="4754880"/>
+          </a:xfrm>
+          <a:prstGeom prst="rect">
+            <a:avLst/>
+          </a:prstGeom>
+        </p:spPr>
+      </p:pic>
+      <p:sp>
+        <p:nvSpPr>
+          <p:cNvPr id="5" name="TextBox 4"/>
           <p:cNvSpPr txBox="1"/>
           <p:nvPr/>
         </p:nvSpPr>
         <p:spPr>
           <a:xfrm>
-            <a:off x="731520" y="1371600"/>
-            <a:ext cx="10698480" cy="5029200"/>
+            <a:off x="7863840" y="1463040"/>
+            <a:ext cx="3657600" cy="4754880"/>
           </a:xfrm>
           <a:prstGeom prst="rect">
             <a:avLst/>
@@ -4495,110 +6283,98 @@
           <a:lstStyle/>
           <a:p>
             <a:pPr>
-              <a:spcBef>
-                <a:spcPts val="800"/>
-              </a:spcBef>
-              <a:defRPr sz="1500" b="1">
-                <a:solidFill>
-                  <a:srgbClr val="1E3A8A"/>
-                </a:solidFill>
-              </a:defRPr>
-            </a:pPr>
-            <a:r>
-              <a:t>⚙ Core Machine Learning Framework</a:t>
-            </a:r>
-          </a:p>
-          <a:p>
-            <a:pPr>
-              <a:defRPr sz="1300">
-                <a:solidFill>
-                  <a:srgbClr val="475569"/>
-                </a:solidFill>
-              </a:defRPr>
-            </a:pPr>
-            <a:r>
-              <a:t>PyTorch 2.0+ / Scikit-learn / HuggingFace Transformers / OpenCV</a:t>
-            </a:r>
-          </a:p>
-          <a:p>
-            <a:pPr>
-              <a:spcBef>
-                <a:spcPts val="800"/>
-              </a:spcBef>
-              <a:defRPr sz="1500" b="1">
-                <a:solidFill>
-                  <a:srgbClr val="1E3A8A"/>
-                </a:solidFill>
-              </a:defRPr>
-            </a:pPr>
-            <a:r>
-              <a:t>⚙ Asynchronous REST Backend</a:t>
-            </a:r>
-          </a:p>
-          <a:p>
-            <a:pPr>
-              <a:defRPr sz="1300">
-                <a:solidFill>
-                  <a:srgbClr val="475569"/>
-                </a:solidFill>
-              </a:defRPr>
-            </a:pPr>
-            <a:r>
-              <a:t>FastAPI / Uvicorn ASGI Server / Pydantic V2 Type Safety</a:t>
-            </a:r>
-          </a:p>
-          <a:p>
-            <a:pPr>
-              <a:spcBef>
-                <a:spcPts val="800"/>
-              </a:spcBef>
-              <a:defRPr sz="1500" b="1">
-                <a:solidFill>
-                  <a:srgbClr val="1E3A8A"/>
-                </a:solidFill>
-              </a:defRPr>
-            </a:pPr>
-            <a:r>
-              <a:t>⚙ Data Persistence &amp; Storage</a:t>
-            </a:r>
-          </a:p>
-          <a:p>
-            <a:pPr>
-              <a:defRPr sz="1300">
-                <a:solidFill>
-                  <a:srgbClr val="475569"/>
-                </a:solidFill>
-              </a:defRPr>
-            </a:pPr>
-            <a:r>
-              <a:t>SQLite / PostgreSQL with transactional integrity &amp; audit trail</a:t>
-            </a:r>
-          </a:p>
-          <a:p>
-            <a:pPr>
-              <a:spcBef>
-                <a:spcPts val="800"/>
-              </a:spcBef>
-              <a:defRPr sz="1500" b="1">
-                <a:solidFill>
-                  <a:srgbClr val="1E3A8A"/>
-                </a:solidFill>
-              </a:defRPr>
-            </a:pPr>
-            <a:r>
-              <a:t>⚙ Interactive Frontend Layer</a:t>
-            </a:r>
-          </a:p>
-          <a:p>
-            <a:pPr>
-              <a:defRPr sz="1300">
-                <a:solidFill>
-                  <a:srgbClr val="475569"/>
-                </a:solidFill>
-              </a:defRPr>
-            </a:pPr>
-            <a:r>
-              <a:t>Modern Responsive Web Portal (HTML5, Tailwind/CSS, JavaScript ES6+)</a:t>
+              <a:defRPr b="1" sz="1500">
+                <a:solidFill>
+                  <a:srgbClr val="EF4444"/>
+                </a:solidFill>
+              </a:defRPr>
+            </a:pPr>
+            <a:r>
+              <a:t>Handgun Interdiction Case</a:t>
+            </a:r>
+          </a:p>
+          <a:p>
+            <a:pPr>
+              <a:defRPr sz="1100">
+                <a:solidFill>
+                  <a:srgbClr val="F8FAFC"/>
+                </a:solidFill>
+              </a:defRPr>
+            </a:pPr>
+            <a:r>
+              <a:t>▶ Target: Concealed semi-automatic pistol</a:t>
+            </a:r>
+          </a:p>
+          <a:p>
+            <a:pPr>
+              <a:defRPr sz="1100">
+                <a:solidFill>
+                  <a:srgbClr val="F8FAFC"/>
+                </a:solidFill>
+              </a:defRPr>
+            </a:pPr>
+            <a:r>
+              <a:t>▶ Confidence: 96.4% certainty score</a:t>
+            </a:r>
+          </a:p>
+          <a:p>
+            <a:pPr>
+              <a:defRPr sz="1100">
+                <a:solidFill>
+                  <a:srgbClr val="F8FAFC"/>
+                </a:solidFill>
+              </a:defRPr>
+            </a:pPr>
+            <a:r>
+              <a:t>▶ Bounding Box: [295, 210, 85, 75]</a:t>
+            </a:r>
+          </a:p>
+          <a:p>
+            <a:pPr>
+              <a:defRPr sz="1100">
+                <a:solidFill>
+                  <a:srgbClr val="F8FAFC"/>
+                </a:solidFill>
+              </a:defRPr>
+            </a:pPr>
+            <a:r>
+              <a:t>▶ Severity: CRITICAL THREAT alert</a:t>
+            </a:r>
+          </a:p>
+          <a:p>
+            <a:pPr>
+              <a:defRPr sz="1100">
+                <a:solidFill>
+                  <a:srgbClr val="F8FAFC"/>
+                </a:solidFill>
+              </a:defRPr>
+            </a:pPr>
+            <a:r>
+              <a:t>▶ Forensic Sharpness: 184.2 Laplacian</a:t>
+            </a:r>
+          </a:p>
+          <a:p>
+            <a:pPr>
+              <a:defRPr sz="1100">
+                <a:solidFill>
+                  <a:srgbClr val="F8FAFC"/>
+                </a:solidFill>
+              </a:defRPr>
+            </a:pPr>
+            <a:r>
+              <a:t>▶ Forensic Contrast: 64.1 std deviation</a:t>
+            </a:r>
+          </a:p>
+          <a:p>
+            <a:pPr>
+              <a:defRPr sz="1100">
+                <a:solidFill>
+                  <a:srgbClr val="F8FAFC"/>
+                </a:solidFill>
+              </a:defRPr>
+            </a:pPr>
+            <a:r>
+              <a:t>▶ Tactical Action: ARU Armed Patrol dispatched</a:t>
             </a:r>
           </a:p>
         </p:txBody>
@@ -4630,13 +6406,13 @@
         <p:spPr>
           <a:xfrm>
             <a:off x="0" y="0"/>
-            <a:ext cx="12191695" cy="1097280"/>
+            <a:ext cx="12191695" cy="6858000"/>
           </a:xfrm>
           <a:prstGeom prst="rect">
             <a:avLst/>
           </a:prstGeom>
           <a:solidFill>
-            <a:srgbClr val="0F172A"/>
+            <a:srgbClr val="0A0F1D"/>
           </a:solidFill>
           <a:ln>
             <a:noFill/>
@@ -4672,8 +6448,8 @@
         </p:nvSpPr>
         <p:spPr>
           <a:xfrm>
-            <a:off x="731520" y="137160"/>
-            <a:ext cx="10698480" cy="822960"/>
+            <a:off x="731520" y="365760"/>
+            <a:ext cx="10728655" cy="1005840"/>
           </a:xfrm>
           <a:prstGeom prst="rect">
             <a:avLst/>
@@ -4687,40 +6463,64 @@
           <a:lstStyle/>
           <a:p>
             <a:pPr>
-              <a:defRPr sz="2400" b="1">
-                <a:solidFill>
-                  <a:srgbClr val="FFFFFF"/>
-                </a:solidFill>
-              </a:defRPr>
-            </a:pPr>
-            <a:r>
-              <a:t>7. Conclusion &amp; Future Roadmap</a:t>
-            </a:r>
-          </a:p>
-          <a:p>
-            <a:pPr>
-              <a:defRPr sz="1100">
-                <a:solidFill>
-                  <a:srgbClr val="94A3B8"/>
-                </a:solidFill>
-              </a:defRPr>
-            </a:pPr>
-            <a:r>
-              <a:t>Academic &amp; Industrial AI Project Series  |  Project 20 of 55</a:t>
-            </a:r>
-          </a:p>
-        </p:txBody>
-      </p:sp>
-      <p:sp>
-        <p:nvSpPr>
-          <p:cNvPr id="4" name="TextBox 3"/>
+              <a:defRPr sz="1100" b="1">
+                <a:solidFill>
+                  <a:srgbClr val="EF4444"/>
+                </a:solidFill>
+              </a:defRPr>
+            </a:pPr>
+            <a:r>
+              <a:t>SECURITY COMPUTER VISION &amp; DEEP LEARNING • PROJECT-020</a:t>
+            </a:r>
+          </a:p>
+          <a:p>
+            <a:pPr>
+              <a:defRPr sz="2200" b="1">
+                <a:solidFill>
+                  <a:srgbClr val="F8FAFC"/>
+                </a:solidFill>
+              </a:defRPr>
+            </a:pPr>
+            <a:r>
+              <a:t>Dual Compare Surveillance: Raw Feed vs Processed Neural Overlay</a:t>
+            </a:r>
+          </a:p>
+        </p:txBody>
+      </p:sp>
+      <p:pic>
+        <p:nvPicPr>
+          <p:cNvPr id="4" name="Picture 3" descr="03_dual_compare_surveillance.png"/>
+          <p:cNvPicPr>
+            <a:picLocks noChangeAspect="1"/>
+          </p:cNvPicPr>
+          <p:nvPr/>
+        </p:nvPicPr>
+        <p:blipFill>
+          <a:blip r:embed="rId2"/>
+          <a:stretch>
+            <a:fillRect/>
+          </a:stretch>
+        </p:blipFill>
+        <p:spPr>
+          <a:xfrm>
+            <a:off x="731520" y="1463040"/>
+            <a:ext cx="6858000" cy="4754880"/>
+          </a:xfrm>
+          <a:prstGeom prst="rect">
+            <a:avLst/>
+          </a:prstGeom>
+        </p:spPr>
+      </p:pic>
+      <p:sp>
+        <p:nvSpPr>
+          <p:cNvPr id="5" name="TextBox 4"/>
           <p:cNvSpPr txBox="1"/>
           <p:nvPr/>
         </p:nvSpPr>
         <p:spPr>
           <a:xfrm>
-            <a:off x="731520" y="1371600"/>
-            <a:ext cx="10698480" cy="5029200"/>
+            <a:off x="7863840" y="1463040"/>
+            <a:ext cx="3657600" cy="4754880"/>
           </a:xfrm>
           <a:prstGeom prst="rect">
             <a:avLst/>
@@ -4734,83 +6534,313 @@
           <a:lstStyle/>
           <a:p>
             <a:pPr>
-              <a:spcBef>
-                <a:spcPts val="1000"/>
-              </a:spcBef>
-              <a:defRPr sz="1500" b="1">
-                <a:solidFill>
-                  <a:srgbClr val="0F172A"/>
-                </a:solidFill>
-              </a:defRPr>
-            </a:pPr>
-            <a:r>
-              <a:t>■ Project Accomplishments</a:t>
-            </a:r>
-          </a:p>
-          <a:p>
-            <a:pPr>
-              <a:defRPr sz="1300">
-                <a:solidFill>
-                  <a:srgbClr val="475569"/>
-                </a:solidFill>
-              </a:defRPr>
-            </a:pPr>
-            <a:r>
-              <a:t>Engineered a robust, end-to-end prototype validating the initial abstract with reproducible experiments.</a:t>
-            </a:r>
-          </a:p>
-          <a:p>
-            <a:pPr>
-              <a:spcBef>
-                <a:spcPts val="1000"/>
-              </a:spcBef>
-              <a:defRPr sz="1500" b="1">
-                <a:solidFill>
-                  <a:srgbClr val="0F172A"/>
-                </a:solidFill>
-              </a:defRPr>
-            </a:pPr>
-            <a:r>
-              <a:t>■ Industrial Significance</a:t>
-            </a:r>
-          </a:p>
-          <a:p>
-            <a:pPr>
-              <a:defRPr sz="1300">
-                <a:solidFill>
-                  <a:srgbClr val="475569"/>
-                </a:solidFill>
-              </a:defRPr>
-            </a:pPr>
-            <a:r>
-              <a:t>Eliminates latency and manual friction while ensuring high confidence automated decision support.</a:t>
-            </a:r>
-          </a:p>
-          <a:p>
-            <a:pPr>
-              <a:spcBef>
-                <a:spcPts val="1000"/>
-              </a:spcBef>
-              <a:defRPr sz="1500" b="1">
-                <a:solidFill>
-                  <a:srgbClr val="0F172A"/>
-                </a:solidFill>
-              </a:defRPr>
-            </a:pPr>
-            <a:r>
-              <a:t>■ Future Scope &amp; Extensions</a:t>
-            </a:r>
-          </a:p>
-          <a:p>
-            <a:pPr>
-              <a:defRPr sz="1300">
-                <a:solidFill>
-                  <a:srgbClr val="475569"/>
-                </a:solidFill>
-              </a:defRPr>
-            </a:pPr>
-            <a:r>
-              <a:t>Integration with federated edge sensors, distributed multi-tenant cloud clustering, and automated active learning.</a:t>
+              <a:defRPr b="1" sz="1500">
+                <a:solidFill>
+                  <a:srgbClr val="06B6D4"/>
+                </a:solidFill>
+              </a:defRPr>
+            </a:pPr>
+            <a:r>
+              <a:t>Comparative Forensics</a:t>
+            </a:r>
+          </a:p>
+          <a:p>
+            <a:pPr>
+              <a:defRPr sz="1100">
+                <a:solidFill>
+                  <a:srgbClr val="94A3B8"/>
+                </a:solidFill>
+              </a:defRPr>
+            </a:pPr>
+            <a:r>
+              <a:t>✔ Side-by-side synchronized viewport rendering</a:t>
+            </a:r>
+          </a:p>
+          <a:p>
+            <a:pPr>
+              <a:defRPr sz="1100">
+                <a:solidFill>
+                  <a:srgbClr val="94A3B8"/>
+                </a:solidFill>
+              </a:defRPr>
+            </a:pPr>
+            <a:r>
+              <a:t>✔ Left Viewport: Unprocessed CCTV optical frame</a:t>
+            </a:r>
+          </a:p>
+          <a:p>
+            <a:pPr>
+              <a:defRPr sz="1100">
+                <a:solidFill>
+                  <a:srgbClr val="94A3B8"/>
+                </a:solidFill>
+              </a:defRPr>
+            </a:pPr>
+            <a:r>
+              <a:t>✔ Right Viewport: Real-time neural bounding boxes &amp; threat color coding</a:t>
+            </a:r>
+          </a:p>
+          <a:p>
+            <a:pPr>
+              <a:defRPr sz="1100">
+                <a:solidFill>
+                  <a:srgbClr val="94A3B8"/>
+                </a:solidFill>
+              </a:defRPr>
+            </a:pPr>
+            <a:r>
+              <a:t>✔ Enables human-in-the-loop secondary forensic verification</a:t>
+            </a:r>
+          </a:p>
+          <a:p>
+            <a:pPr>
+              <a:defRPr sz="1100">
+                <a:solidFill>
+                  <a:srgbClr val="94A3B8"/>
+                </a:solidFill>
+              </a:defRPr>
+            </a:pPr>
+            <a:r>
+              <a:t>✔ Allows security officers to inspect subtle occlusions and edge artifacts</a:t>
+            </a:r>
+          </a:p>
+        </p:txBody>
+      </p:sp>
+    </p:spTree>
+  </p:cSld>
+  <p:clrMapOvr>
+    <a:masterClrMapping/>
+  </p:clrMapOvr>
+</p:sld>
+</file>
+
+<file path=ppt/slides/slide9.xml><?xml version="1.0" encoding="utf-8"?>
+<p:sld xmlns:a="http://schemas.openxmlformats.org/drawingml/2006/main" xmlns:p="http://schemas.openxmlformats.org/presentationml/2006/main" xmlns:r="http://schemas.openxmlformats.org/officeDocument/2006/relationships">
+  <p:cSld>
+    <p:spTree>
+      <p:nvGrpSpPr>
+        <p:cNvPr id="1" name=""/>
+        <p:cNvGrpSpPr/>
+        <p:nvPr/>
+      </p:nvGrpSpPr>
+      <p:grpSpPr/>
+      <p:sp>
+        <p:nvSpPr>
+          <p:cNvPr id="2" name="Rectangle 1"/>
+          <p:cNvSpPr/>
+          <p:nvPr/>
+        </p:nvSpPr>
+        <p:spPr>
+          <a:xfrm>
+            <a:off x="0" y="0"/>
+            <a:ext cx="12191695" cy="6858000"/>
+          </a:xfrm>
+          <a:prstGeom prst="rect">
+            <a:avLst/>
+          </a:prstGeom>
+          <a:solidFill>
+            <a:srgbClr val="0A0F1D"/>
+          </a:solidFill>
+          <a:ln>
+            <a:noFill/>
+          </a:ln>
+        </p:spPr>
+        <p:style>
+          <a:lnRef idx="1">
+            <a:schemeClr val="accent1"/>
+          </a:lnRef>
+          <a:fillRef idx="3">
+            <a:schemeClr val="accent1"/>
+          </a:fillRef>
+          <a:effectRef idx="2">
+            <a:schemeClr val="accent1"/>
+          </a:effectRef>
+          <a:fontRef idx="minor">
+            <a:schemeClr val="lt1"/>
+          </a:fontRef>
+        </p:style>
+        <p:txBody>
+          <a:bodyPr rtlCol="0" anchor="ctr"/>
+          <a:lstStyle/>
+          <a:p>
+            <a:pPr algn="ctr"/>
+          </a:p>
+        </p:txBody>
+      </p:sp>
+      <p:sp>
+        <p:nvSpPr>
+          <p:cNvPr id="3" name="TextBox 2"/>
+          <p:cNvSpPr txBox="1"/>
+          <p:nvPr/>
+        </p:nvSpPr>
+        <p:spPr>
+          <a:xfrm>
+            <a:off x="731520" y="365760"/>
+            <a:ext cx="10728655" cy="1005840"/>
+          </a:xfrm>
+          <a:prstGeom prst="rect">
+            <a:avLst/>
+          </a:prstGeom>
+          <a:noFill/>
+        </p:spPr>
+        <p:txBody>
+          <a:bodyPr wrap="square">
+            <a:spAutoFit/>
+          </a:bodyPr>
+          <a:lstStyle/>
+          <a:p>
+            <a:pPr>
+              <a:defRPr sz="1100" b="1">
+                <a:solidFill>
+                  <a:srgbClr val="EF4444"/>
+                </a:solidFill>
+              </a:defRPr>
+            </a:pPr>
+            <a:r>
+              <a:t>SECURITY COMPUTER VISION &amp; DEEP LEARNING • PROJECT-020</a:t>
+            </a:r>
+          </a:p>
+          <a:p>
+            <a:pPr>
+              <a:defRPr sz="2200" b="1">
+                <a:solidFill>
+                  <a:srgbClr val="F8FAFC"/>
+                </a:solidFill>
+              </a:defRPr>
+            </a:pPr>
+            <a:r>
+              <a:t>Multi-Camera Surveillance Matrix &amp; CCTV Wall Integration</a:t>
+            </a:r>
+          </a:p>
+        </p:txBody>
+      </p:sp>
+      <p:pic>
+        <p:nvPicPr>
+          <p:cNvPr id="4" name="Picture 3" descr="05_cctv_wall_monitoring.png"/>
+          <p:cNvPicPr>
+            <a:picLocks noChangeAspect="1"/>
+          </p:cNvPicPr>
+          <p:nvPr/>
+        </p:nvPicPr>
+        <p:blipFill>
+          <a:blip r:embed="rId2"/>
+          <a:stretch>
+            <a:fillRect/>
+          </a:stretch>
+        </p:blipFill>
+        <p:spPr>
+          <a:xfrm>
+            <a:off x="731520" y="1463040"/>
+            <a:ext cx="6858000" cy="4754880"/>
+          </a:xfrm>
+          <a:prstGeom prst="rect">
+            <a:avLst/>
+          </a:prstGeom>
+        </p:spPr>
+      </p:pic>
+      <p:sp>
+        <p:nvSpPr>
+          <p:cNvPr id="5" name="TextBox 4"/>
+          <p:cNvSpPr txBox="1"/>
+          <p:nvPr/>
+        </p:nvSpPr>
+        <p:spPr>
+          <a:xfrm>
+            <a:off x="7863840" y="1463040"/>
+            <a:ext cx="3657600" cy="4754880"/>
+          </a:xfrm>
+          <a:prstGeom prst="rect">
+            <a:avLst/>
+          </a:prstGeom>
+          <a:noFill/>
+        </p:spPr>
+        <p:txBody>
+          <a:bodyPr wrap="square">
+            <a:spAutoFit/>
+          </a:bodyPr>
+          <a:lstStyle/>
+          <a:p>
+            <a:pPr>
+              <a:defRPr b="1" sz="1500">
+                <a:solidFill>
+                  <a:srgbClr val="10B981"/>
+                </a:solidFill>
+              </a:defRPr>
+            </a:pPr>
+            <a:r>
+              <a:t>CCTV Monitoring Nodes</a:t>
+            </a:r>
+          </a:p>
+          <a:p>
+            <a:pPr>
+              <a:defRPr sz="1100">
+                <a:solidFill>
+                  <a:srgbClr val="94A3B8"/>
+                </a:solidFill>
+              </a:defRPr>
+            </a:pPr>
+            <a:r>
+              <a:t>• CAM-01: North Terminal Concourse (Optical PTZ)</a:t>
+            </a:r>
+          </a:p>
+          <a:p>
+            <a:pPr>
+              <a:defRPr sz="1100">
+                <a:solidFill>
+                  <a:srgbClr val="94A3B8"/>
+                </a:solidFill>
+              </a:defRPr>
+            </a:pPr>
+            <a:r>
+              <a:t>• CAM-02: Baggage Screening Hall (X-Ray / Thermal)</a:t>
+            </a:r>
+          </a:p>
+          <a:p>
+            <a:pPr>
+              <a:defRPr sz="1100">
+                <a:solidFill>
+                  <a:srgbClr val="94A3B8"/>
+                </a:solidFill>
+              </a:defRPr>
+            </a:pPr>
+            <a:r>
+              <a:t>• CAM-03: Gate 4 Perimeter Checkpoint (IR Night-Vision)</a:t>
+            </a:r>
+          </a:p>
+          <a:p>
+            <a:pPr>
+              <a:defRPr sz="1100">
+                <a:solidFill>
+                  <a:srgbClr val="94A3B8"/>
+                </a:solidFill>
+              </a:defRPr>
+            </a:pPr>
+            <a:r>
+              <a:t>• CAM-04: VIP Executive Lounge (Dome Camera)</a:t>
+            </a:r>
+          </a:p>
+          <a:p>
+            <a:pPr>
+              <a:defRPr sz="1100">
+                <a:solidFill>
+                  <a:srgbClr val="94A3B8"/>
+                </a:solidFill>
+              </a:defRPr>
+            </a:pPr>
+            <a:r>
+              <a:t>• Real-time FPS and resolution indicator per node</a:t>
+            </a:r>
+          </a:p>
+          <a:p>
+            <a:pPr>
+              <a:defRPr sz="1100">
+                <a:solidFill>
+                  <a:srgbClr val="94A3B8"/>
+                </a:solidFill>
+              </a:defRPr>
+            </a:pPr>
+            <a:r>
+              <a:t>• Instant camera focus toggle and zone inspection</a:t>
             </a:r>
           </a:p>
         </p:txBody>
